--- a/docs/go-to-market/02_Brand_Pitch_Deck/FluxMuse_Pitch_SMEs.pptx
+++ b/docs/go-to-market/02_Brand_Pitch_Deck/FluxMuse_Pitch_SMEs.pptx
@@ -732,7 +732,7 @@
           <a:lstStyle/>
           <a:p>
             <a:r>
-              <a:t>Most SMEs start on Growth at R1,999 a month: three brands, 15 channels and inbound AI Voice in beta. Single-brand businesses can start on Starter at R499. Multi-brand groups should look at Scale at R4,999: ten brands, 40 channels, and inbound and outbound AI Voice in beta, which we evaluate together. Annual billing is ten times monthly. No trials: every paid plan starts with payment. Founding Members in South Africa pay 30% less for the first two bills: R1,399 on Growth. Larger groups: Corporate or Custom (CURRENT_OFFER.md §1).</a:t>
+              <a:t>Most SMEs start on Growth at R1,999 a month: three brands, 15 channels and inbound AI Voice in beta. Single-brand businesses can start on Starter at R499. Multi-brand groups should look at Scale at R4,999: ten brands, 40 channels, and inbound and outbound AI Voice in beta, which we evaluate together. Annual billing is ten times monthly. No trials: every paid plan starts with payment. Founding Members pay 30% less for the first two bills, R1,399 on Growth, until 31 December 2026. Larger groups: Corporate or Custom (CURRENT_OFFER.md §1).</a:t>
             </a:r>
           </a:p>
         </p:txBody>
@@ -802,7 +802,7 @@
           <a:lstStyle/>
           <a:p>
             <a:r>
-              <a:t>This is the same pricing as an editable table, useful when you tailor the deck. It shows all nine plans with monthly and annual prices, where annual is ten times monthly, plus brands and channels. The Founding Member column is 30% off the first two monthly bills for South African sign-ups, rounded down to whole rands. Agencies don't get Founding Member pricing; point them to the R6,999 partner price instead. Corporate launch pricing is by conversation. If you edit a price, check it against CURRENT_OFFER.md §1 first, and never add per-plan AI credit numbers.</a:t>
+              <a:t>This is the same pricing as an editable table, useful when you tailor the deck. It shows all nine plans with monthly and annual prices, where annual is ten times monthly, plus brands and channels. The Founding Member column is 30% off the first two monthly bills, rounded down to whole rands, on every self-serve plan from Nano to Agency until 31 December 2026; Custom is excluded. It doesn't stack with partner pricing: the Agency wholesale price is also R6,999, but it runs every month. If you edit a price, check CURRENT_OFFER.md §1 first, and never add per-plan AI credit numbers.</a:t>
             </a:r>
           </a:p>
         </p:txBody>
@@ -872,7 +872,7 @@
           <a:lstStyle/>
           <a:p>
             <a:r>
-              <a:t>Founding Member is live now for South African sign-ups: 30% off the first two monthly bills. On Growth that's R1,399 instead of R1,999 for two months; on Scale R3,499 instead of R4,999; on Starter R349. Then the normal price. It's a discount, not a free period, and there's no set end date, so say "while it lasts". Don't offer bonus months on annual plans or other perks; only the discount is confirmed. Larger groups on Corporate: talk to us (00_FACTS §2 "Founding Member").</a:t>
+              <a:t>Founding Member is live now on every self-serve plan until 31 December 2026: 30% off the first two monthly bills. On Growth that's R1,399 instead of R1,999 for two months; on Scale R3,499 instead of R4,999; on Starter R349; on Corporate R4,899. Then the normal price. It's a discount, not a free period. Don't offer bonus months on annual plans or other perks; only the discount is confirmed (CURRENT_OFFER.md §1).</a:t>
             </a:r>
           </a:p>
         </p:txBody>
@@ -1012,7 +1012,7 @@
           <a:lstStyle/>
           <a:p>
             <a:r>
-              <a:t>Here's what comes next, in order, with no dates. On markets: South Africa is open now, with Paystack live. Next, checkout through FluxMuse, switched on once it's tested end to end with real money. Then Nigeria, Kenya and Ghana, once the pawaPay and Fincra accounts are live. Later, other markets in US dollars; Botswana and Namibia are coming soon. On product: Meta permissions for Facebook and Instagram posting, then social adapters, business app integrations, and the partner programme. Timing depends on approvals, so don't give dates (00_FACTS §1 "Roadmap").</a:t>
+              <a:t>Here's what comes next, in order, with no dates. On markets: South Africa is open now, by card and EFT. Next, checkout through FluxMuse, switched on once it's tested end to end with real money. Then Nigeria, Kenya and Ghana, once our payment partners' accounts are live. Later, other markets in US dollars; Botswana and Namibia are coming soon. On product: the partner programme is already live; next come Meta permissions for Facebook and Instagram posting, then social adapters and business app integrations. Timing depends on approvals, so don't give dates (00_FACTS §1 "Roadmap").</a:t>
             </a:r>
           </a:p>
         </p:txBody>
@@ -1222,7 +1222,7 @@
           <a:lstStyle/>
           <a:p>
             <a:r>
-              <a:t>This matrix shows payment status by country. Only South Africa is open for paid sign-up: Paystack is live there, and Yoco and Ozow run FluxMuse's own subscription billing. Checkout through FluxMuse for a business's buyers is still being switched on. pawaPay and Fincra are contracted for expansion, but the accounts are pending, so none of those countries is open. Nigeria, Kenya and Ghana are priced in local currency but not on sale. Botswana and Namibia are coming soon with no provider yet. Source: CURRENT_OFFER.md §3; 00_FACTS §3.</a:t>
+              <a:t>This table shows payment status by country, with no provider names. Only South Africa is open for paid sign-up, by card and EFT. Checkout through FluxMuse for a business's buyers is still being switched on. Nigeria, Kenya and Ghana are priced in local currency but not on sale. The countries marked not open yet are where we're expanding via our payment partners, banks and mobile money wallets across 23 African countries. Botswana and Namibia are coming soon. If asked which provider runs payments, say "our payment partners" (CURRENT_OFFER.md §3; 00_FACTS §3).</a:t>
             </a:r>
           </a:p>
         </p:txBody>
@@ -1642,7 +1642,7 @@
           <a:lstStyle/>
           <a:p>
             <a:r>
-              <a:t>This is the heart of the pitch. A buyer finds you through a Status post, a QR code or your shop link. The assistant replies in their language. They browse a catalogue built from your photos, fill a cart, and the order lands on your WhatsApp; you reply SOLD to keep track. Be honest about payment: checkout through FluxMuse on Paystack is built but being switched on, because it hasn't been tested end to end with real money. Until then, orders arrive as a WhatsApp message and you take payment your usual way (CURRENT_OFFER.md §3). Broadcasts go only to consented contacts.</a:t>
+              <a:t>This is the heart of the pitch. A buyer finds you through a Status post, a QR code or your shop link. The assistant replies in their language. They browse a catalogue built from your photos, fill a cart, and the order lands on your WhatsApp; you reply SOLD to keep track. Be honest about payment: checkout through FluxMuse, via our payment partners, is built but being switched on, because it hasn't been tested with real money. Until then, orders arrive as a WhatsApp message and you take payment your usual way (CURRENT_OFFER.md §3). Broadcasts go only to consented contacts.</a:t>
             </a:r>
           </a:p>
         </p:txBody>
@@ -1712,7 +1712,7 @@
           <a:lstStyle/>
           <a:p>
             <a:r>
-              <a:t>This is the whole platform, with every piece labelled. Solid chips are live and newly launched: WhatsApp Business, Status, TikTok video, consented broadcasts, catalogue from photos, captions, images, clips, voice-note transcription, the shop link and order alerts. Dashed chips are being switched on: Facebook and Instagram posting, AI Voice in beta, Paystack checkout, the daily digest, click-to-WhatsApp ads and Shopify, WooCommerce and Takealot sync. Instagram DMs and X posting are not available. Labels follow CURRENT_OFFER.md §3. Ask which piece matters most to them.</a:t>
+              <a:t>This is the whole platform, with every piece labelled. Solid chips are live and newly launched: WhatsApp Business, Status, TikTok video, consented broadcasts, catalogue from photos, captions, images, clips, voice-note transcription, the shop link and order alerts. Dashed chips are being switched on: Facebook and Instagram posting, AI Voice in beta, checkout through FluxMuse, the daily digest, click-to-WhatsApp ads and Shopify and WooCommerce sync. Instagram DMs and X posting are not available. Labels follow CURRENT_OFFER.md §3. Ask which piece matters most to them.</a:t>
             </a:r>
           </a:p>
         </p:txBody>
@@ -1782,7 +1782,7 @@
           <a:lstStyle/>
           <a:p>
             <a:r>
-              <a:t>SMEs rarely start from zero, so be honest about what connects today. On the left is what's being switched on: sync from Shopify, WooCommerce and Takealot, which is only partly built, so don't promise it, plus Facebook and Instagram posting, AI Voice in beta and the daily digest. Until sync is on, we build the catalogue from product photos. On the right is what a team can use now: WhatsApp templates and quick replies, several brands on one account, order alerts, consented broadcasts and replies in the customer's language. AI Voice is beta, evaluated together (CURRENT_OFFER.md §3).</a:t>
+              <a:t>SMEs rarely start from zero, so be honest about what connects today. On the left is what's being switched on: sync from Shopify and WooCommerce, which is only partly built, so don't promise it, plus Facebook and Instagram posting, AI Voice in beta and the daily digest. Until sync is on, we build the catalogue from product photos. On the right is what a team can use now: WhatsApp templates and quick replies, several brands on one account, order alerts, consented broadcasts and replies in the customer's language. AI Voice is beta, evaluated together (CURRENT_OFFER.md §3).</a:t>
             </a:r>
           </a:p>
         </p:txBody>
@@ -1852,7 +1852,7 @@
           <a:lstStyle/>
           <a:p>
             <a:r>
-              <a:t>Be straight about payments. FluxMuse is open for paid sign-up in South Africa only, where Paystack is live. Checkout through FluxMuse for your buyers is built and being switched on; it hasn't been tested end to end with real money yet. Nigeria, Kenya and Ghana are priced but not on sale, because the provider accounts are still pending. pawaPay and Fincra are contracted for expansion, with accounts pending, so the other countries on the map are not open. Botswana and Namibia are coming soon. Source: CURRENT_OFFER.md §3 and §4; 00_FACTS §3.</a:t>
+              <a:t>Be straight about payments. FluxMuse is open for paid sign-up in South Africa only, by card and EFT. Checkout through FluxMuse for your buyers is built and being switched on; it hasn't been tested end to end with real money yet. Nigeria, Kenya and Ghana are priced but not on sale. The other tiles are countries we're expanding into via our payment partners, banks and mobile money wallets across 23 African countries; none is open yet. Botswana and Namibia are coming soon. Never name a payment provider or gateway (CURRENT_OFFER.md §3; 00_FACTS §3).</a:t>
             </a:r>
           </a:p>
         </p:txBody>
@@ -4938,7 +4938,7 @@
       <p:grpSpPr/>
       <p:pic>
         <p:nvPicPr>
-          <p:cNvPr id="2" name="g161|img|brand/fluxmuse-logo-dark.png" descr="FluxMuse logo"/>
+          <p:cNvPr id="2" name="g165|img|brand/fluxmuse-logo-dark.png" descr="FluxMuse logo"/>
           <p:cNvPicPr>
             <a:picLocks noChangeAspect="1"/>
           </p:cNvPicPr>
@@ -4963,7 +4963,7 @@
       </p:pic>
       <p:sp>
         <p:nvSpPr>
-          <p:cNvPr id="3" name="g162|deco|"/>
+          <p:cNvPr id="3" name="g166|deco|"/>
           <p:cNvSpPr/>
           <p:nvPr/>
         </p:nvSpPr>
@@ -5007,7 +5007,7 @@
       </p:sp>
       <p:pic>
         <p:nvPicPr>
-          <p:cNvPr id="4" name="g162|img|brand/fluxmuse-icon-512.png" descr="FluxMuse Muse icon"/>
+          <p:cNvPr id="4" name="g166|img|brand/fluxmuse-icon-512.png" descr="FluxMuse Muse icon"/>
           <p:cNvPicPr>
             <a:picLocks noChangeAspect="1"/>
           </p:cNvPicPr>
@@ -5032,7 +5032,7 @@
       </p:pic>
       <p:sp>
         <p:nvSpPr>
-          <p:cNvPr id="5" name="g163|eyebrow|"/>
+          <p:cNvPr id="5" name="g167|eyebrow|"/>
           <p:cNvSpPr txBox="1"/>
           <p:nvPr/>
         </p:nvSpPr>
@@ -5067,7 +5067,7 @@
       </p:sp>
       <p:sp>
         <p:nvSpPr>
-          <p:cNvPr id="6" name="g164|title|"/>
+          <p:cNvPr id="6" name="g168|title|"/>
           <p:cNvSpPr txBox="1"/>
           <p:nvPr/>
         </p:nvSpPr>
@@ -5122,7 +5122,7 @@
       </p:sp>
       <p:sp>
         <p:nvSpPr>
-          <p:cNvPr id="7" name="g165|body|"/>
+          <p:cNvPr id="7" name="g169|body|"/>
           <p:cNvSpPr txBox="1"/>
           <p:nvPr/>
         </p:nvSpPr>
@@ -5157,7 +5157,7 @@
       </p:sp>
       <p:sp>
         <p:nvSpPr>
-          <p:cNvPr id="8" name="g166|placeholder|"/>
+          <p:cNvPr id="8" name="g170|placeholder|"/>
           <p:cNvSpPr txBox="1"/>
           <p:nvPr/>
         </p:nvSpPr>
@@ -5201,7 +5201,7 @@
       </p:sp>
       <p:sp>
         <p:nvSpPr>
-          <p:cNvPr id="9" name="g166|placeholder|"/>
+          <p:cNvPr id="9" name="g170|placeholder|"/>
           <p:cNvSpPr txBox="1"/>
           <p:nvPr/>
         </p:nvSpPr>
@@ -5262,7 +5262,7 @@
       <p:grpSpPr/>
       <p:sp>
         <p:nvSpPr>
-          <p:cNvPr id="2" name="hdr206|eyebrow|"/>
+          <p:cNvPr id="2" name="hdr209|eyebrow|"/>
           <p:cNvSpPr txBox="1"/>
           <p:nvPr/>
         </p:nvSpPr>
@@ -5297,7 +5297,7 @@
       </p:sp>
       <p:sp>
         <p:nvSpPr>
-          <p:cNvPr id="3" name="hdr206|title|"/>
+          <p:cNvPr id="3" name="hdr209|title|"/>
           <p:cNvSpPr txBox="1"/>
           <p:nvPr/>
         </p:nvSpPr>
@@ -5332,7 +5332,7 @@
       </p:sp>
       <p:pic>
         <p:nvPicPr>
-          <p:cNvPr id="4" name="g207|img|infographics/brand-engagement-journey.png" descr="Discovery call, demo on your products, set up by hand, go live (lead guarantee starts), weekly check-ins, keep growing; measures agreed together"/>
+          <p:cNvPr id="4" name="g210|img|infographics/brand-engagement-journey.png" descr="Discovery call, demo on your products, set up by hand, go live (lead guarantee starts), weekly check-ins, keep growing; measures agreed together"/>
           <p:cNvPicPr>
             <a:picLocks noChangeAspect="1"/>
           </p:cNvPicPr>
@@ -5453,7 +5453,7 @@
       <p:grpSpPr/>
       <p:sp>
         <p:nvSpPr>
-          <p:cNvPr id="2" name="hdr208|eyebrow|"/>
+          <p:cNvPr id="2" name="hdr211|eyebrow|"/>
           <p:cNvSpPr txBox="1"/>
           <p:nvPr/>
         </p:nvSpPr>
@@ -5488,7 +5488,7 @@
       </p:sp>
       <p:sp>
         <p:nvSpPr>
-          <p:cNvPr id="3" name="hdr208|title|"/>
+          <p:cNvPr id="3" name="hdr211|title|"/>
           <p:cNvSpPr txBox="1"/>
           <p:nvPr/>
         </p:nvSpPr>
@@ -5523,7 +5523,7 @@
       </p:sp>
       <p:sp>
         <p:nvSpPr>
-          <p:cNvPr id="4" name="fg209|card|"/>
+          <p:cNvPr id="4" name="fg212|card|"/>
           <p:cNvSpPr/>
           <p:nvPr/>
         </p:nvSpPr>
@@ -5569,7 +5569,7 @@
       </p:sp>
       <p:sp>
         <p:nvSpPr>
-          <p:cNvPr id="5" name="fg209|card|"/>
+          <p:cNvPr id="5" name="fg212|card|"/>
           <p:cNvSpPr txBox="1"/>
           <p:nvPr/>
         </p:nvSpPr>
@@ -5604,7 +5604,7 @@
       </p:sp>
       <p:sp>
         <p:nvSpPr>
-          <p:cNvPr id="6" name="g210|deco|"/>
+          <p:cNvPr id="6" name="g213|deco|"/>
           <p:cNvSpPr/>
           <p:nvPr/>
         </p:nvSpPr>
@@ -5648,7 +5648,7 @@
       </p:sp>
       <p:pic>
         <p:nvPicPr>
-          <p:cNvPr id="7" name="g210|icon|users_deep.png" descr="users_deep"/>
+          <p:cNvPr id="7" name="g213|icon|users_deep.png" descr="users_deep"/>
           <p:cNvPicPr>
             <a:picLocks noChangeAspect="1"/>
           </p:cNvPicPr>
@@ -5673,7 +5673,7 @@
       </p:pic>
       <p:sp>
         <p:nvSpPr>
-          <p:cNvPr id="8" name="g210|body|"/>
+          <p:cNvPr id="8" name="g213|body|"/>
           <p:cNvSpPr txBox="1"/>
           <p:nvPr/>
         </p:nvSpPr>
@@ -5708,7 +5708,7 @@
       </p:sp>
       <p:sp>
         <p:nvSpPr>
-          <p:cNvPr id="9" name="g211|deco|"/>
+          <p:cNvPr id="9" name="g214|deco|"/>
           <p:cNvSpPr/>
           <p:nvPr/>
         </p:nvSpPr>
@@ -5752,7 +5752,7 @@
       </p:sp>
       <p:pic>
         <p:nvPicPr>
-          <p:cNvPr id="10" name="g211|icon|calendar_deep.png" descr="calendar_deep"/>
+          <p:cNvPr id="10" name="g214|icon|calendar_deep.png" descr="calendar_deep"/>
           <p:cNvPicPr>
             <a:picLocks noChangeAspect="1"/>
           </p:cNvPicPr>
@@ -5777,7 +5777,7 @@
       </p:pic>
       <p:sp>
         <p:nvSpPr>
-          <p:cNvPr id="11" name="g211|body|"/>
+          <p:cNvPr id="11" name="g214|body|"/>
           <p:cNvSpPr txBox="1"/>
           <p:nvPr/>
         </p:nvSpPr>
@@ -5812,7 +5812,7 @@
       </p:sp>
       <p:sp>
         <p:nvSpPr>
-          <p:cNvPr id="12" name="g212|deco|"/>
+          <p:cNvPr id="12" name="g215|deco|"/>
           <p:cNvSpPr/>
           <p:nvPr/>
         </p:nvSpPr>
@@ -5856,7 +5856,7 @@
       </p:sp>
       <p:pic>
         <p:nvPicPr>
-          <p:cNvPr id="13" name="g212|icon|chat_deep.png" descr="chat_deep"/>
+          <p:cNvPr id="13" name="g215|icon|chat_deep.png" descr="chat_deep"/>
           <p:cNvPicPr>
             <a:picLocks noChangeAspect="1"/>
           </p:cNvPicPr>
@@ -5881,7 +5881,7 @@
       </p:pic>
       <p:sp>
         <p:nvSpPr>
-          <p:cNvPr id="14" name="g212|body|"/>
+          <p:cNvPr id="14" name="g215|body|"/>
           <p:cNvSpPr txBox="1"/>
           <p:nvPr/>
         </p:nvSpPr>
@@ -5916,7 +5916,7 @@
       </p:sp>
       <p:sp>
         <p:nvSpPr>
-          <p:cNvPr id="15" name="g213|deco|"/>
+          <p:cNvPr id="15" name="g216|deco|"/>
           <p:cNvSpPr/>
           <p:nvPr/>
         </p:nvSpPr>
@@ -5960,7 +5960,7 @@
       </p:sp>
       <p:pic>
         <p:nvPicPr>
-          <p:cNvPr id="16" name="g213|icon|shield_deep.png" descr="shield_deep"/>
+          <p:cNvPr id="16" name="g216|icon|shield_deep.png" descr="shield_deep"/>
           <p:cNvPicPr>
             <a:picLocks noChangeAspect="1"/>
           </p:cNvPicPr>
@@ -5985,7 +5985,7 @@
       </p:pic>
       <p:sp>
         <p:nvSpPr>
-          <p:cNvPr id="17" name="g213|body|"/>
+          <p:cNvPr id="17" name="g216|body|"/>
           <p:cNvSpPr txBox="1"/>
           <p:nvPr/>
         </p:nvSpPr>
@@ -6020,7 +6020,7 @@
       </p:sp>
       <p:sp>
         <p:nvSpPr>
-          <p:cNvPr id="18" name="lg214|card|"/>
+          <p:cNvPr id="18" name="lg217|card|"/>
           <p:cNvSpPr/>
           <p:nvPr/>
         </p:nvSpPr>
@@ -6066,7 +6066,7 @@
       </p:sp>
       <p:sp>
         <p:nvSpPr>
-          <p:cNvPr id="19" name="lg214|deco|"/>
+          <p:cNvPr id="19" name="lg217|deco|"/>
           <p:cNvSpPr/>
           <p:nvPr/>
         </p:nvSpPr>
@@ -6110,7 +6110,7 @@
       </p:sp>
       <p:pic>
         <p:nvPicPr>
-          <p:cNvPr id="20" name="lg214|icon|target_deep.png" descr="target_deep"/>
+          <p:cNvPr id="20" name="lg217|icon|target_deep.png" descr="target_deep"/>
           <p:cNvPicPr>
             <a:picLocks noChangeAspect="1"/>
           </p:cNvPicPr>
@@ -6135,7 +6135,7 @@
       </p:pic>
       <p:sp>
         <p:nvSpPr>
-          <p:cNvPr id="21" name="lg214|eyebrow|"/>
+          <p:cNvPr id="21" name="lg217|eyebrow|"/>
           <p:cNvSpPr txBox="1"/>
           <p:nvPr/>
         </p:nvSpPr>
@@ -6170,7 +6170,7 @@
       </p:sp>
       <p:sp>
         <p:nvSpPr>
-          <p:cNvPr id="22" name="lg214|card|"/>
+          <p:cNvPr id="22" name="lg217|card|"/>
           <p:cNvSpPr txBox="1"/>
           <p:nvPr/>
         </p:nvSpPr>
@@ -6209,7 +6209,7 @@
       </p:sp>
       <p:sp>
         <p:nvSpPr>
-          <p:cNvPr id="23" name="lg214|caption|"/>
+          <p:cNvPr id="23" name="lg217|caption|"/>
           <p:cNvSpPr txBox="1"/>
           <p:nvPr/>
         </p:nvSpPr>
@@ -6344,7 +6344,7 @@
       <p:grpSpPr/>
       <p:sp>
         <p:nvSpPr>
-          <p:cNvPr id="2" name="hdr215|eyebrow|"/>
+          <p:cNvPr id="2" name="hdr218|eyebrow|"/>
           <p:cNvSpPr txBox="1"/>
           <p:nvPr/>
         </p:nvSpPr>
@@ -6379,7 +6379,7 @@
       </p:sp>
       <p:sp>
         <p:nvSpPr>
-          <p:cNvPr id="3" name="hdr215|title|"/>
+          <p:cNvPr id="3" name="hdr218|title|"/>
           <p:cNvSpPr txBox="1"/>
           <p:nvPr/>
         </p:nvSpPr>
@@ -6414,7 +6414,7 @@
       </p:sp>
       <p:sp>
         <p:nvSpPr>
-          <p:cNvPr id="4" name="plan216|card|"/>
+          <p:cNvPr id="4" name="plan219|card|"/>
           <p:cNvSpPr/>
           <p:nvPr/>
         </p:nvSpPr>
@@ -6460,7 +6460,7 @@
       </p:sp>
       <p:sp>
         <p:nvSpPr>
-          <p:cNvPr id="5" name="plan216|card|"/>
+          <p:cNvPr id="5" name="plan219|card|"/>
           <p:cNvSpPr txBox="1"/>
           <p:nvPr/>
         </p:nvSpPr>
@@ -6495,7 +6495,7 @@
       </p:sp>
       <p:sp>
         <p:nvSpPr>
-          <p:cNvPr id="6" name="plan216|card|"/>
+          <p:cNvPr id="6" name="plan219|card|"/>
           <p:cNvSpPr txBox="1"/>
           <p:nvPr/>
         </p:nvSpPr>
@@ -6539,7 +6539,7 @@
       </p:sp>
       <p:sp>
         <p:nvSpPr>
-          <p:cNvPr id="7" name="plan216|caption|"/>
+          <p:cNvPr id="7" name="plan219|caption|"/>
           <p:cNvSpPr txBox="1"/>
           <p:nvPr/>
         </p:nvSpPr>
@@ -6574,7 +6574,7 @@
       </p:sp>
       <p:sp>
         <p:nvSpPr>
-          <p:cNvPr id="8" name="plan216|card|"/>
+          <p:cNvPr id="8" name="plan219|card|"/>
           <p:cNvSpPr txBox="1"/>
           <p:nvPr/>
         </p:nvSpPr>
@@ -6609,7 +6609,7 @@
       </p:sp>
       <p:sp>
         <p:nvSpPr>
-          <p:cNvPr id="9" name="plan216|card|"/>
+          <p:cNvPr id="9" name="plan219|card|"/>
           <p:cNvSpPr txBox="1"/>
           <p:nvPr/>
         </p:nvSpPr>
@@ -6644,7 +6644,7 @@
       </p:sp>
       <p:sp>
         <p:nvSpPr>
-          <p:cNvPr id="10" name="plan216|caption|"/>
+          <p:cNvPr id="10" name="plan219|caption|"/>
           <p:cNvSpPr txBox="1"/>
           <p:nvPr/>
         </p:nvSpPr>
@@ -6695,7 +6695,7 @@
       </p:sp>
       <p:sp>
         <p:nvSpPr>
-          <p:cNvPr id="11" name="plan217|card|"/>
+          <p:cNvPr id="11" name="plan220|card|"/>
           <p:cNvSpPr/>
           <p:nvPr/>
         </p:nvSpPr>
@@ -6743,7 +6743,7 @@
       </p:sp>
       <p:sp>
         <p:nvSpPr>
-          <p:cNvPr id="12" name="plan217|card|"/>
+          <p:cNvPr id="12" name="plan220|card|"/>
           <p:cNvSpPr txBox="1"/>
           <p:nvPr/>
         </p:nvSpPr>
@@ -6778,7 +6778,7 @@
       </p:sp>
       <p:sp>
         <p:nvSpPr>
-          <p:cNvPr id="13" name="plan217|card|"/>
+          <p:cNvPr id="13" name="plan220|card|"/>
           <p:cNvSpPr txBox="1"/>
           <p:nvPr/>
         </p:nvSpPr>
@@ -6822,7 +6822,7 @@
       </p:sp>
       <p:sp>
         <p:nvSpPr>
-          <p:cNvPr id="14" name="plan217|caption|"/>
+          <p:cNvPr id="14" name="plan220|caption|"/>
           <p:cNvSpPr txBox="1"/>
           <p:nvPr/>
         </p:nvSpPr>
@@ -6857,7 +6857,7 @@
       </p:sp>
       <p:sp>
         <p:nvSpPr>
-          <p:cNvPr id="15" name="plan217|card|"/>
+          <p:cNvPr id="15" name="plan220|card|"/>
           <p:cNvSpPr txBox="1"/>
           <p:nvPr/>
         </p:nvSpPr>
@@ -6892,7 +6892,7 @@
       </p:sp>
       <p:sp>
         <p:nvSpPr>
-          <p:cNvPr id="16" name="plan217|card|"/>
+          <p:cNvPr id="16" name="plan220|card|"/>
           <p:cNvSpPr txBox="1"/>
           <p:nvPr/>
         </p:nvSpPr>
@@ -6927,7 +6927,7 @@
       </p:sp>
       <p:sp>
         <p:nvSpPr>
-          <p:cNvPr id="17" name="plan217|caption|"/>
+          <p:cNvPr id="17" name="plan220|caption|"/>
           <p:cNvSpPr txBox="1"/>
           <p:nvPr/>
         </p:nvSpPr>
@@ -6978,7 +6978,7 @@
       </p:sp>
       <p:sp>
         <p:nvSpPr>
-          <p:cNvPr id="18" name="plan218|card|"/>
+          <p:cNvPr id="18" name="plan221|card|"/>
           <p:cNvSpPr/>
           <p:nvPr/>
         </p:nvSpPr>
@@ -7024,7 +7024,7 @@
       </p:sp>
       <p:sp>
         <p:nvSpPr>
-          <p:cNvPr id="19" name="plan218|card|"/>
+          <p:cNvPr id="19" name="plan221|card|"/>
           <p:cNvSpPr txBox="1"/>
           <p:nvPr/>
         </p:nvSpPr>
@@ -7059,7 +7059,7 @@
       </p:sp>
       <p:sp>
         <p:nvSpPr>
-          <p:cNvPr id="20" name="plan218|card|"/>
+          <p:cNvPr id="20" name="plan221|card|"/>
           <p:cNvSpPr txBox="1"/>
           <p:nvPr/>
         </p:nvSpPr>
@@ -7103,7 +7103,7 @@
       </p:sp>
       <p:sp>
         <p:nvSpPr>
-          <p:cNvPr id="21" name="plan218|caption|"/>
+          <p:cNvPr id="21" name="plan221|caption|"/>
           <p:cNvSpPr txBox="1"/>
           <p:nvPr/>
         </p:nvSpPr>
@@ -7138,7 +7138,7 @@
       </p:sp>
       <p:sp>
         <p:nvSpPr>
-          <p:cNvPr id="22" name="plan218|card|"/>
+          <p:cNvPr id="22" name="plan221|card|"/>
           <p:cNvSpPr txBox="1"/>
           <p:nvPr/>
         </p:nvSpPr>
@@ -7173,7 +7173,7 @@
       </p:sp>
       <p:sp>
         <p:nvSpPr>
-          <p:cNvPr id="23" name="plan218|card|"/>
+          <p:cNvPr id="23" name="plan221|card|"/>
           <p:cNvSpPr txBox="1"/>
           <p:nvPr/>
         </p:nvSpPr>
@@ -7208,7 +7208,7 @@
       </p:sp>
       <p:sp>
         <p:nvSpPr>
-          <p:cNvPr id="24" name="plan218|caption|"/>
+          <p:cNvPr id="24" name="plan221|caption|"/>
           <p:cNvSpPr txBox="1"/>
           <p:nvPr/>
         </p:nvSpPr>
@@ -7259,7 +7259,7 @@
       </p:sp>
       <p:sp>
         <p:nvSpPr>
-          <p:cNvPr id="25" name="g219|caption|"/>
+          <p:cNvPr id="25" name="g222|caption|"/>
           <p:cNvSpPr txBox="1"/>
           <p:nvPr/>
         </p:nvSpPr>
@@ -7303,7 +7303,7 @@
                 </a:solidFill>
                 <a:latin typeface="Inter"/>
               </a:rPr>
-              <a:t>Founding Member: 30% off your first two monthly bills, South African sign-ups, while it lasts.</a:t>
+              <a:t>Founding Member: 30% off your first two monthly bills on every plan, Nano to Agency, until 31 December 2026.</a:t>
             </a:r>
           </a:p>
         </p:txBody>
@@ -7406,7 +7406,7 @@
       <p:grpSpPr/>
       <p:sp>
         <p:nvSpPr>
-          <p:cNvPr id="2" name="hdr220|eyebrow|"/>
+          <p:cNvPr id="2" name="hdr223|eyebrow|"/>
           <p:cNvSpPr txBox="1"/>
           <p:nvPr/>
         </p:nvSpPr>
@@ -7441,7 +7441,7 @@
       </p:sp>
       <p:sp>
         <p:nvSpPr>
-          <p:cNvPr id="3" name="hdr220|title|"/>
+          <p:cNvPr id="3" name="hdr223|title|"/>
           <p:cNvSpPr txBox="1"/>
           <p:nvPr/>
         </p:nvSpPr>
@@ -7476,7 +7476,7 @@
       </p:sp>
       <p:graphicFrame>
         <p:nvGraphicFramePr>
-          <p:cNvPr id="4" name="g221|table|pricing-zar"/>
+          <p:cNvPr id="4" name="g224|table|pricing-zar"/>
           <p:cNvGraphicFramePr>
             <a:graphicFrameLocks noGrp="1"/>
           </p:cNvGraphicFramePr>
@@ -9253,7 +9253,7 @@
                           </a:solidFill>
                           <a:latin typeface="Inter"/>
                         </a:rPr>
-                        <a:t>Talk to us</a:t>
+                        <a:t>R4,899</a:t>
                       </a:r>
                     </a:p>
                   </a:txBody>
@@ -9477,7 +9477,7 @@
                           </a:solidFill>
                           <a:latin typeface="Inter"/>
                         </a:rPr>
-                        <a:t>Partner price R6,999</a:t>
+                        <a:t>R6,999</a:t>
                       </a:r>
                     </a:p>
                   </a:txBody>
@@ -9732,7 +9732,7 @@
       </p:graphicFrame>
       <p:sp>
         <p:nvSpPr>
-          <p:cNvPr id="5" name="g222|caption|"/>
+          <p:cNvPr id="5" name="g225|caption|"/>
           <p:cNvSpPr txBox="1"/>
           <p:nvPr/>
         </p:nvSpPr>
@@ -9760,7 +9760,7 @@
                 </a:solidFill>
                 <a:latin typeface="Inter"/>
               </a:rPr>
-              <a:t>Prices are what you pay. No trials: every paid plan starts with payment; Free is a permanent plan. AI credit allowances: see fluxmuse.ai/pricing. Paid sign-up is open in South Africa.</a:t>
+              <a:t>Prices are what you pay. No trials: every paid plan starts with payment; Free is a permanent plan. Founding Member: every plan from Nano to Agency, until 31 Dec 2026. Paid sign-up: South Africa.</a:t>
             </a:r>
           </a:p>
         </p:txBody>
@@ -9863,7 +9863,7 @@
       <p:grpSpPr/>
       <p:sp>
         <p:nvSpPr>
-          <p:cNvPr id="2" name="hdr223|eyebrow|"/>
+          <p:cNvPr id="2" name="hdr226|eyebrow|"/>
           <p:cNvSpPr txBox="1"/>
           <p:nvPr/>
         </p:nvSpPr>
@@ -9891,14 +9891,14 @@
                 </a:solidFill>
                 <a:latin typeface="Inter"/>
               </a:rPr>
-              <a:t>LAUNCH OFFER · SOUTH AFRICA · LIVE NOW</a:t>
-            </a:r>
-          </a:p>
-        </p:txBody>
-      </p:sp>
-      <p:sp>
-        <p:nvSpPr>
-          <p:cNvPr id="3" name="hdr223|title|"/>
+              <a:t>LAUNCH OFFER · LIVE UNTIL 31 DEC 2026</a:t>
+            </a:r>
+          </a:p>
+        </p:txBody>
+      </p:sp>
+      <p:sp>
+        <p:nvSpPr>
+          <p:cNvPr id="3" name="hdr226|title|"/>
           <p:cNvSpPr txBox="1"/>
           <p:nvPr/>
         </p:nvSpPr>
@@ -9933,7 +9933,7 @@
       </p:sp>
       <p:pic>
         <p:nvPicPr>
-          <p:cNvPr id="4" name="g224|img|infographics/founding-member-offer.png" descr="Founding Member: 30% off your first two monthly bills, South African sign-ups, while it lasts: Nano R104, Micro R202, Starter R349, Growth R1,399, Scale R3,499; a discount, not a free period"/>
+          <p:cNvPr id="4" name="g227|img|infographics/founding-member-offer.png" descr="Founding Member: 30% off your first two monthly bills on every plan until 31 December 2026: Nano R104, Micro R202, Starter R349, Growth R1,399, Scale R3,499, Corporate R4,899, Agency R6,999; a discount, not a free period"/>
           <p:cNvPicPr>
             <a:picLocks noChangeAspect="1"/>
           </p:cNvPicPr>
@@ -10054,7 +10054,7 @@
       <p:grpSpPr/>
       <p:sp>
         <p:nvSpPr>
-          <p:cNvPr id="2" name="hdr225|eyebrow|"/>
+          <p:cNvPr id="2" name="hdr228|eyebrow|"/>
           <p:cNvSpPr txBox="1"/>
           <p:nvPr/>
         </p:nvSpPr>
@@ -10089,7 +10089,7 @@
       </p:sp>
       <p:sp>
         <p:nvSpPr>
-          <p:cNvPr id="3" name="hdr225|title|"/>
+          <p:cNvPr id="3" name="hdr228|title|"/>
           <p:cNvSpPr txBox="1"/>
           <p:nvPr/>
         </p:nvSpPr>
@@ -10124,7 +10124,7 @@
       </p:sp>
       <p:sp>
         <p:nvSpPr>
-          <p:cNvPr id="4" name="trust226|card|"/>
+          <p:cNvPr id="4" name="trust229|card|"/>
           <p:cNvSpPr/>
           <p:nvPr/>
         </p:nvSpPr>
@@ -10170,7 +10170,7 @@
       </p:sp>
       <p:sp>
         <p:nvSpPr>
-          <p:cNvPr id="5" name="trust226|deco|"/>
+          <p:cNvPr id="5" name="trust229|deco|"/>
           <p:cNvSpPr/>
           <p:nvPr/>
         </p:nvSpPr>
@@ -10214,7 +10214,7 @@
       </p:sp>
       <p:pic>
         <p:nvPicPr>
-          <p:cNvPr id="6" name="trust226|icon|checkCircle_deep.png" descr="checkCircle_deep"/>
+          <p:cNvPr id="6" name="trust229|icon|checkCircle_deep.png" descr="checkCircle_deep"/>
           <p:cNvPicPr>
             <a:picLocks noChangeAspect="1"/>
           </p:cNvPicPr>
@@ -10239,7 +10239,7 @@
       </p:pic>
       <p:sp>
         <p:nvSpPr>
-          <p:cNvPr id="7" name="trust226|card|"/>
+          <p:cNvPr id="7" name="trust229|card|"/>
           <p:cNvSpPr txBox="1"/>
           <p:nvPr/>
         </p:nvSpPr>
@@ -10274,7 +10274,7 @@
       </p:sp>
       <p:sp>
         <p:nvSpPr>
-          <p:cNvPr id="8" name="trust226|card|"/>
+          <p:cNvPr id="8" name="trust229|card|"/>
           <p:cNvSpPr txBox="1"/>
           <p:nvPr/>
         </p:nvSpPr>
@@ -10309,7 +10309,7 @@
       </p:sp>
       <p:sp>
         <p:nvSpPr>
-          <p:cNvPr id="9" name="trust227|card|"/>
+          <p:cNvPr id="9" name="trust230|card|"/>
           <p:cNvSpPr/>
           <p:nvPr/>
         </p:nvSpPr>
@@ -10355,7 +10355,7 @@
       </p:sp>
       <p:sp>
         <p:nvSpPr>
-          <p:cNvPr id="10" name="trust227|deco|"/>
+          <p:cNvPr id="10" name="trust230|deco|"/>
           <p:cNvSpPr/>
           <p:nvPr/>
         </p:nvSpPr>
@@ -10399,7 +10399,7 @@
       </p:sp>
       <p:pic>
         <p:nvPicPr>
-          <p:cNvPr id="11" name="trust227|icon|chat_deep.png" descr="chat_deep"/>
+          <p:cNvPr id="11" name="trust230|icon|chat_deep.png" descr="chat_deep"/>
           <p:cNvPicPr>
             <a:picLocks noChangeAspect="1"/>
           </p:cNvPicPr>
@@ -10424,7 +10424,7 @@
       </p:pic>
       <p:sp>
         <p:nvSpPr>
-          <p:cNvPr id="12" name="trust227|card|"/>
+          <p:cNvPr id="12" name="trust230|card|"/>
           <p:cNvSpPr txBox="1"/>
           <p:nvPr/>
         </p:nvSpPr>
@@ -10459,7 +10459,7 @@
       </p:sp>
       <p:sp>
         <p:nvSpPr>
-          <p:cNvPr id="13" name="trust227|card|"/>
+          <p:cNvPr id="13" name="trust230|card|"/>
           <p:cNvSpPr txBox="1"/>
           <p:nvPr/>
         </p:nvSpPr>
@@ -10494,7 +10494,7 @@
       </p:sp>
       <p:sp>
         <p:nvSpPr>
-          <p:cNvPr id="14" name="trust228|card|"/>
+          <p:cNvPr id="14" name="trust231|card|"/>
           <p:cNvSpPr/>
           <p:nvPr/>
         </p:nvSpPr>
@@ -10540,7 +10540,7 @@
       </p:sp>
       <p:sp>
         <p:nvSpPr>
-          <p:cNvPr id="15" name="trust228|deco|"/>
+          <p:cNvPr id="15" name="trust231|deco|"/>
           <p:cNvSpPr/>
           <p:nvPr/>
         </p:nvSpPr>
@@ -10584,7 +10584,7 @@
       </p:sp>
       <p:pic>
         <p:nvPicPr>
-          <p:cNvPr id="16" name="trust228|icon|shield_deep.png" descr="shield_deep"/>
+          <p:cNvPr id="16" name="trust231|icon|shield_deep.png" descr="shield_deep"/>
           <p:cNvPicPr>
             <a:picLocks noChangeAspect="1"/>
           </p:cNvPicPr>
@@ -10609,7 +10609,7 @@
       </p:pic>
       <p:sp>
         <p:nvSpPr>
-          <p:cNvPr id="17" name="trust228|card|"/>
+          <p:cNvPr id="17" name="trust231|card|"/>
           <p:cNvSpPr txBox="1"/>
           <p:nvPr/>
         </p:nvSpPr>
@@ -10644,7 +10644,7 @@
       </p:sp>
       <p:sp>
         <p:nvSpPr>
-          <p:cNvPr id="18" name="trust228|card|"/>
+          <p:cNvPr id="18" name="trust231|card|"/>
           <p:cNvSpPr txBox="1"/>
           <p:nvPr/>
         </p:nvSpPr>
@@ -10679,7 +10679,7 @@
       </p:sp>
       <p:sp>
         <p:nvSpPr>
-          <p:cNvPr id="19" name="trust229|card|"/>
+          <p:cNvPr id="19" name="trust232|card|"/>
           <p:cNvSpPr/>
           <p:nvPr/>
         </p:nvSpPr>
@@ -10725,7 +10725,7 @@
       </p:sp>
       <p:sp>
         <p:nvSpPr>
-          <p:cNvPr id="20" name="trust229|deco|"/>
+          <p:cNvPr id="20" name="trust232|deco|"/>
           <p:cNvSpPr/>
           <p:nvPr/>
         </p:nvSpPr>
@@ -10769,7 +10769,7 @@
       </p:sp>
       <p:pic>
         <p:nvPicPr>
-          <p:cNvPr id="21" name="trust229|icon|layers_deep.png" descr="layers_deep"/>
+          <p:cNvPr id="21" name="trust232|icon|layers_deep.png" descr="layers_deep"/>
           <p:cNvPicPr>
             <a:picLocks noChangeAspect="1"/>
           </p:cNvPicPr>
@@ -10794,7 +10794,7 @@
       </p:pic>
       <p:sp>
         <p:nvSpPr>
-          <p:cNvPr id="22" name="trust229|card|"/>
+          <p:cNvPr id="22" name="trust232|card|"/>
           <p:cNvSpPr txBox="1"/>
           <p:nvPr/>
         </p:nvSpPr>
@@ -10829,7 +10829,7 @@
       </p:sp>
       <p:sp>
         <p:nvSpPr>
-          <p:cNvPr id="23" name="trust229|card|"/>
+          <p:cNvPr id="23" name="trust232|card|"/>
           <p:cNvSpPr txBox="1"/>
           <p:nvPr/>
         </p:nvSpPr>
@@ -10864,7 +10864,7 @@
       </p:sp>
       <p:sp>
         <p:nvSpPr>
-          <p:cNvPr id="24" name="trust230|card|"/>
+          <p:cNvPr id="24" name="trust233|card|"/>
           <p:cNvSpPr/>
           <p:nvPr/>
         </p:nvSpPr>
@@ -10910,7 +10910,7 @@
       </p:sp>
       <p:sp>
         <p:nvSpPr>
-          <p:cNvPr id="25" name="trust230|deco|"/>
+          <p:cNvPr id="25" name="trust233|deco|"/>
           <p:cNvSpPr/>
           <p:nvPr/>
         </p:nvSpPr>
@@ -10954,7 +10954,7 @@
       </p:sp>
       <p:pic>
         <p:nvPicPr>
-          <p:cNvPr id="26" name="trust230|icon|plug_deep.png" descr="plug_deep"/>
+          <p:cNvPr id="26" name="trust233|icon|plug_deep.png" descr="plug_deep"/>
           <p:cNvPicPr>
             <a:picLocks noChangeAspect="1"/>
           </p:cNvPicPr>
@@ -10979,7 +10979,7 @@
       </p:pic>
       <p:sp>
         <p:nvSpPr>
-          <p:cNvPr id="27" name="trust230|card|"/>
+          <p:cNvPr id="27" name="trust233|card|"/>
           <p:cNvSpPr txBox="1"/>
           <p:nvPr/>
         </p:nvSpPr>
@@ -11014,7 +11014,7 @@
       </p:sp>
       <p:sp>
         <p:nvSpPr>
-          <p:cNvPr id="28" name="trust230|card|"/>
+          <p:cNvPr id="28" name="trust233|card|"/>
           <p:cNvSpPr txBox="1"/>
           <p:nvPr/>
         </p:nvSpPr>
@@ -11049,7 +11049,7 @@
       </p:sp>
       <p:sp>
         <p:nvSpPr>
-          <p:cNvPr id="29" name="trust231|card|"/>
+          <p:cNvPr id="29" name="trust234|card|"/>
           <p:cNvSpPr/>
           <p:nvPr/>
         </p:nvSpPr>
@@ -11095,7 +11095,7 @@
       </p:sp>
       <p:sp>
         <p:nvSpPr>
-          <p:cNvPr id="30" name="trust231|deco|"/>
+          <p:cNvPr id="30" name="trust234|deco|"/>
           <p:cNvSpPr/>
           <p:nvPr/>
         </p:nvSpPr>
@@ -11139,7 +11139,7 @@
       </p:sp>
       <p:pic>
         <p:nvPicPr>
-          <p:cNvPr id="31" name="trust231|icon|refresh_deep.png" descr="refresh_deep"/>
+          <p:cNvPr id="31" name="trust234|icon|refresh_deep.png" descr="refresh_deep"/>
           <p:cNvPicPr>
             <a:picLocks noChangeAspect="1"/>
           </p:cNvPicPr>
@@ -11164,7 +11164,7 @@
       </p:pic>
       <p:sp>
         <p:nvSpPr>
-          <p:cNvPr id="32" name="trust231|card|"/>
+          <p:cNvPr id="32" name="trust234|card|"/>
           <p:cNvSpPr txBox="1"/>
           <p:nvPr/>
         </p:nvSpPr>
@@ -11199,7 +11199,7 @@
       </p:sp>
       <p:sp>
         <p:nvSpPr>
-          <p:cNvPr id="33" name="trust231|card|"/>
+          <p:cNvPr id="33" name="trust234|card|"/>
           <p:cNvSpPr txBox="1"/>
           <p:nvPr/>
         </p:nvSpPr>
@@ -11330,7 +11330,7 @@
       <p:grpSpPr/>
       <p:sp>
         <p:nvSpPr>
-          <p:cNvPr id="2" name="hdr232|eyebrow|"/>
+          <p:cNvPr id="2" name="hdr235|eyebrow|"/>
           <p:cNvSpPr txBox="1"/>
           <p:nvPr/>
         </p:nvSpPr>
@@ -11365,7 +11365,7 @@
       </p:sp>
       <p:sp>
         <p:nvSpPr>
-          <p:cNvPr id="3" name="hdr232|title|"/>
+          <p:cNvPr id="3" name="hdr235|title|"/>
           <p:cNvSpPr txBox="1"/>
           <p:nvPr/>
         </p:nvSpPr>
@@ -11400,7 +11400,7 @@
       </p:sp>
       <p:pic>
         <p:nvPicPr>
-          <p:cNvPr id="4" name="g233|img|infographics/roadmap-2026-2027.png" descr="Indicative order, no dates. Markets: South Africa open now, then checkout through FluxMuse, then Nigeria, Kenya and Ghana, then other markets in USD. Product: Meta permissions, social adapters, business apps, partner programme"/>
+          <p:cNvPr id="4" name="g236|img|infographics/roadmap-2026-2027.png" descr="Indicative order, no dates. Markets: South Africa open now, then checkout through FluxMuse, then Nigeria, Kenya and Ghana, then other markets in USD. Product: live today including the partner programme, then Meta permissions, social adapters, business apps"/>
           <p:cNvPicPr>
             <a:picLocks noChangeAspect="1"/>
           </p:cNvPicPr>
@@ -11521,7 +11521,7 @@
       <p:grpSpPr/>
       <p:sp>
         <p:nvSpPr>
-          <p:cNvPr id="2" name="hdr234|eyebrow|"/>
+          <p:cNvPr id="2" name="hdr237|eyebrow|"/>
           <p:cNvSpPr txBox="1"/>
           <p:nvPr/>
         </p:nvSpPr>
@@ -11556,7 +11556,7 @@
       </p:sp>
       <p:sp>
         <p:nvSpPr>
-          <p:cNvPr id="3" name="hdr234|title|"/>
+          <p:cNvPr id="3" name="hdr237|title|"/>
           <p:cNvSpPr txBox="1"/>
           <p:nvPr/>
         </p:nvSpPr>
@@ -11591,7 +11591,7 @@
       </p:sp>
       <p:sp>
         <p:nvSpPr>
-          <p:cNvPr id="4" name="cta235|card|"/>
+          <p:cNvPr id="4" name="cta238|card|"/>
           <p:cNvSpPr/>
           <p:nvPr/>
         </p:nvSpPr>
@@ -11637,7 +11637,7 @@
       </p:sp>
       <p:sp>
         <p:nvSpPr>
-          <p:cNvPr id="5" name="cta235|deco|"/>
+          <p:cNvPr id="5" name="cta238|deco|"/>
           <p:cNvSpPr/>
           <p:nvPr/>
         </p:nvSpPr>
@@ -11681,7 +11681,7 @@
       </p:sp>
       <p:sp>
         <p:nvSpPr>
-          <p:cNvPr id="6" name="cta235|card|"/>
+          <p:cNvPr id="6" name="cta238|card|"/>
           <p:cNvSpPr txBox="1"/>
           <p:nvPr/>
         </p:nvSpPr>
@@ -11716,7 +11716,7 @@
       </p:sp>
       <p:sp>
         <p:nvSpPr>
-          <p:cNvPr id="7" name="cta235|card|"/>
+          <p:cNvPr id="7" name="cta238|card|"/>
           <p:cNvSpPr txBox="1"/>
           <p:nvPr/>
         </p:nvSpPr>
@@ -11751,7 +11751,7 @@
       </p:sp>
       <p:sp>
         <p:nvSpPr>
-          <p:cNvPr id="8" name="cta235|card|"/>
+          <p:cNvPr id="8" name="cta238|card|"/>
           <p:cNvSpPr txBox="1"/>
           <p:nvPr/>
         </p:nvSpPr>
@@ -11786,7 +11786,7 @@
       </p:sp>
       <p:sp>
         <p:nvSpPr>
-          <p:cNvPr id="9" name="cta236|card|"/>
+          <p:cNvPr id="9" name="cta239|card|"/>
           <p:cNvSpPr/>
           <p:nvPr/>
         </p:nvSpPr>
@@ -11832,7 +11832,7 @@
       </p:sp>
       <p:sp>
         <p:nvSpPr>
-          <p:cNvPr id="10" name="cta236|deco|"/>
+          <p:cNvPr id="10" name="cta239|deco|"/>
           <p:cNvSpPr/>
           <p:nvPr/>
         </p:nvSpPr>
@@ -11876,7 +11876,7 @@
       </p:sp>
       <p:sp>
         <p:nvSpPr>
-          <p:cNvPr id="11" name="cta236|card|"/>
+          <p:cNvPr id="11" name="cta239|card|"/>
           <p:cNvSpPr txBox="1"/>
           <p:nvPr/>
         </p:nvSpPr>
@@ -11911,7 +11911,7 @@
       </p:sp>
       <p:sp>
         <p:nvSpPr>
-          <p:cNvPr id="12" name="cta236|card|"/>
+          <p:cNvPr id="12" name="cta239|card|"/>
           <p:cNvSpPr txBox="1"/>
           <p:nvPr/>
         </p:nvSpPr>
@@ -11946,7 +11946,7 @@
       </p:sp>
       <p:sp>
         <p:nvSpPr>
-          <p:cNvPr id="13" name="cta236|card|"/>
+          <p:cNvPr id="13" name="cta239|card|"/>
           <p:cNvSpPr txBox="1"/>
           <p:nvPr/>
         </p:nvSpPr>
@@ -11981,7 +11981,7 @@
       </p:sp>
       <p:sp>
         <p:nvSpPr>
-          <p:cNvPr id="14" name="cta237|card|"/>
+          <p:cNvPr id="14" name="cta240|card|"/>
           <p:cNvSpPr/>
           <p:nvPr/>
         </p:nvSpPr>
@@ -12027,7 +12027,7 @@
       </p:sp>
       <p:sp>
         <p:nvSpPr>
-          <p:cNvPr id="15" name="cta237|deco|"/>
+          <p:cNvPr id="15" name="cta240|deco|"/>
           <p:cNvSpPr/>
           <p:nvPr/>
         </p:nvSpPr>
@@ -12071,7 +12071,7 @@
       </p:sp>
       <p:sp>
         <p:nvSpPr>
-          <p:cNvPr id="16" name="cta237|card|"/>
+          <p:cNvPr id="16" name="cta240|card|"/>
           <p:cNvSpPr txBox="1"/>
           <p:nvPr/>
         </p:nvSpPr>
@@ -12106,7 +12106,7 @@
       </p:sp>
       <p:sp>
         <p:nvSpPr>
-          <p:cNvPr id="17" name="cta237|card|"/>
+          <p:cNvPr id="17" name="cta240|card|"/>
           <p:cNvSpPr txBox="1"/>
           <p:nvPr/>
         </p:nvSpPr>
@@ -12141,7 +12141,7 @@
       </p:sp>
       <p:sp>
         <p:nvSpPr>
-          <p:cNvPr id="18" name="cta237|card|"/>
+          <p:cNvPr id="18" name="cta240|card|"/>
           <p:cNvSpPr txBox="1"/>
           <p:nvPr/>
         </p:nvSpPr>
@@ -12176,7 +12176,7 @@
       </p:sp>
       <p:sp>
         <p:nvSpPr>
-          <p:cNvPr id="19" name="contact238|card|"/>
+          <p:cNvPr id="19" name="contact241|card|"/>
           <p:cNvSpPr/>
           <p:nvPr/>
         </p:nvSpPr>
@@ -12222,7 +12222,7 @@
       </p:sp>
       <p:sp>
         <p:nvSpPr>
-          <p:cNvPr id="20" name="contact238|eyebrow|"/>
+          <p:cNvPr id="20" name="contact241|eyebrow|"/>
           <p:cNvSpPr txBox="1"/>
           <p:nvPr/>
         </p:nvSpPr>
@@ -12257,7 +12257,7 @@
       </p:sp>
       <p:sp>
         <p:nvSpPr>
-          <p:cNvPr id="21" name="contact238|body|"/>
+          <p:cNvPr id="21" name="contact241|body|"/>
           <p:cNvSpPr txBox="1"/>
           <p:nvPr/>
         </p:nvSpPr>
@@ -12340,7 +12340,7 @@
       </p:sp>
       <p:sp>
         <p:nvSpPr>
-          <p:cNvPr id="22" name="contact238|deco|"/>
+          <p:cNvPr id="22" name="contact241|deco|"/>
           <p:cNvSpPr/>
           <p:nvPr/>
         </p:nvSpPr>
@@ -12387,7 +12387,7 @@
       </p:sp>
       <p:sp>
         <p:nvSpPr>
-          <p:cNvPr id="23" name="contact238|caption|"/>
+          <p:cNvPr id="23" name="contact241|caption|"/>
           <p:cNvSpPr txBox="1"/>
           <p:nvPr/>
         </p:nvSpPr>
@@ -12422,7 +12422,7 @@
       </p:sp>
       <p:sp>
         <p:nvSpPr>
-          <p:cNvPr id="24" name="contact238|placeholder|"/>
+          <p:cNvPr id="24" name="contact241|placeholder|"/>
           <p:cNvSpPr txBox="1"/>
           <p:nvPr/>
         </p:nvSpPr>
@@ -12581,7 +12581,7 @@
       <p:grpSpPr/>
       <p:sp>
         <p:nvSpPr>
-          <p:cNvPr id="2" name="g239|eyebrow|"/>
+          <p:cNvPr id="2" name="g242|eyebrow|"/>
           <p:cNvSpPr txBox="1"/>
           <p:nvPr/>
         </p:nvSpPr>
@@ -12616,7 +12616,7 @@
       </p:sp>
       <p:sp>
         <p:nvSpPr>
-          <p:cNvPr id="3" name="g240|title|"/>
+          <p:cNvPr id="3" name="g243|title|"/>
           <p:cNvSpPr txBox="1"/>
           <p:nvPr/>
         </p:nvSpPr>
@@ -12651,7 +12651,7 @@
       </p:sp>
       <p:sp>
         <p:nvSpPr>
-          <p:cNvPr id="4" name="ax241|chip|"/>
+          <p:cNvPr id="4" name="ax244|chip|"/>
           <p:cNvSpPr/>
           <p:nvPr/>
         </p:nvSpPr>
@@ -12697,7 +12697,7 @@
       </p:sp>
       <p:sp>
         <p:nvSpPr>
-          <p:cNvPr id="5" name="ax241|chip|"/>
+          <p:cNvPr id="5" name="ax244|chip|"/>
           <p:cNvSpPr txBox="1"/>
           <p:nvPr/>
         </p:nvSpPr>
@@ -12732,7 +12732,7 @@
       </p:sp>
       <p:sp>
         <p:nvSpPr>
-          <p:cNvPr id="6" name="ax241|body|"/>
+          <p:cNvPr id="6" name="ax244|body|"/>
           <p:cNvSpPr txBox="1"/>
           <p:nvPr/>
         </p:nvSpPr>
@@ -12767,7 +12767,7 @@
       </p:sp>
       <p:sp>
         <p:nvSpPr>
-          <p:cNvPr id="7" name="ax242|chip|"/>
+          <p:cNvPr id="7" name="ax245|chip|"/>
           <p:cNvSpPr/>
           <p:nvPr/>
         </p:nvSpPr>
@@ -12813,7 +12813,7 @@
       </p:sp>
       <p:sp>
         <p:nvSpPr>
-          <p:cNvPr id="8" name="ax242|chip|"/>
+          <p:cNvPr id="8" name="ax245|chip|"/>
           <p:cNvSpPr txBox="1"/>
           <p:nvPr/>
         </p:nvSpPr>
@@ -12848,7 +12848,7 @@
       </p:sp>
       <p:sp>
         <p:nvSpPr>
-          <p:cNvPr id="9" name="ax242|body|"/>
+          <p:cNvPr id="9" name="ax245|body|"/>
           <p:cNvSpPr txBox="1"/>
           <p:nvPr/>
         </p:nvSpPr>
@@ -12979,7 +12979,7 @@
       <p:grpSpPr/>
       <p:sp>
         <p:nvSpPr>
-          <p:cNvPr id="2" name="hdr243|eyebrow|"/>
+          <p:cNvPr id="2" name="hdr246|eyebrow|"/>
           <p:cNvSpPr txBox="1"/>
           <p:nvPr/>
         </p:nvSpPr>
@@ -13014,7 +13014,7 @@
       </p:sp>
       <p:sp>
         <p:nvSpPr>
-          <p:cNvPr id="3" name="hdr243|title|"/>
+          <p:cNvPr id="3" name="hdr246|title|"/>
           <p:cNvSpPr txBox="1"/>
           <p:nvPr/>
         </p:nvSpPr>
@@ -13049,7 +13049,7 @@
       </p:sp>
       <p:pic>
         <p:nvPicPr>
-          <p:cNvPr id="4" name="g244|img|infographics/payment-rails-matrix.png" descr="Matrix of countries against payment providers: Paystack live in South Africa; Yoco and Ozow for FluxMuse subscription billing; pawaPay and Fincra contracted, account pending; Botswana and Namibia coming soon"/>
+          <p:cNvPr id="4" name="g247|img|infographics/payment-rails-matrix.png" descr="Table of countries by status: South Africa live, card and EFT; Nigeria, Kenya and Ghana priced, not on sale; other covered countries not open yet; Botswana and Namibia coming soon"/>
           <p:cNvPicPr>
             <a:picLocks noChangeAspect="1"/>
           </p:cNvPicPr>
@@ -13170,7 +13170,7 @@
       <p:grpSpPr/>
       <p:sp>
         <p:nvSpPr>
-          <p:cNvPr id="2" name="hdr167|eyebrow|"/>
+          <p:cNvPr id="2" name="hdr171|eyebrow|"/>
           <p:cNvSpPr txBox="1"/>
           <p:nvPr/>
         </p:nvSpPr>
@@ -13205,7 +13205,7 @@
       </p:sp>
       <p:sp>
         <p:nvSpPr>
-          <p:cNvPr id="3" name="hdr167|title|"/>
+          <p:cNvPr id="3" name="hdr171|title|"/>
           <p:cNvSpPr txBox="1"/>
           <p:nvPr/>
         </p:nvSpPr>
@@ -13240,7 +13240,7 @@
       </p:sp>
       <p:pic>
         <p:nvPicPr>
-          <p:cNvPr id="4" name="g168|img|infographics/problem-solution.png" descr="Today: disconnected tools, retainers beyond small budgets, orders lost in chats, after-hours messages unanswered. With FluxMuse: an AI marketing team in WhatsApp, paid plans from R149, photos to a catalogue and shop link, answers in the customer's language."/>
+          <p:cNvPr id="4" name="g172|img|infographics/problem-solution.png" descr="Today: disconnected tools, retainers beyond small budgets, orders lost in chats, after-hours messages unanswered. With FluxMuse: an AI marketing team in WhatsApp, paid plans from R149, photos to a catalogue and shop link, answers in the customer's language."/>
           <p:cNvPicPr>
             <a:picLocks noChangeAspect="1"/>
           </p:cNvPicPr>
@@ -13361,7 +13361,7 @@
       <p:grpSpPr/>
       <p:sp>
         <p:nvSpPr>
-          <p:cNvPr id="2" name="hdr245|eyebrow|"/>
+          <p:cNvPr id="2" name="hdr248|eyebrow|"/>
           <p:cNvSpPr txBox="1"/>
           <p:nvPr/>
         </p:nvSpPr>
@@ -13396,7 +13396,7 @@
       </p:sp>
       <p:sp>
         <p:nvSpPr>
-          <p:cNvPr id="3" name="hdr245|title|"/>
+          <p:cNvPr id="3" name="hdr248|title|"/>
           <p:cNvSpPr txBox="1"/>
           <p:nvPr/>
         </p:nvSpPr>
@@ -13431,7 +13431,7 @@
       </p:sp>
       <p:sp>
         <p:nvSpPr>
-          <p:cNvPr id="4" name="faq246|card|"/>
+          <p:cNvPr id="4" name="faq249|card|"/>
           <p:cNvSpPr/>
           <p:nvPr/>
         </p:nvSpPr>
@@ -13477,7 +13477,7 @@
       </p:sp>
       <p:sp>
         <p:nvSpPr>
-          <p:cNvPr id="5" name="faq246|deco|"/>
+          <p:cNvPr id="5" name="faq249|deco|"/>
           <p:cNvSpPr/>
           <p:nvPr/>
         </p:nvSpPr>
@@ -13521,7 +13521,7 @@
       </p:sp>
       <p:pic>
         <p:nvPicPr>
-          <p:cNvPr id="6" name="faq246|icon|chat_deep.png" descr="chat_deep"/>
+          <p:cNvPr id="6" name="faq249|icon|chat_deep.png" descr="chat_deep"/>
           <p:cNvPicPr>
             <a:picLocks noChangeAspect="1"/>
           </p:cNvPicPr>
@@ -13546,7 +13546,7 @@
       </p:pic>
       <p:sp>
         <p:nvSpPr>
-          <p:cNvPr id="7" name="faq246|card|"/>
+          <p:cNvPr id="7" name="faq249|card|"/>
           <p:cNvSpPr txBox="1"/>
           <p:nvPr/>
         </p:nvSpPr>
@@ -13581,7 +13581,7 @@
       </p:sp>
       <p:sp>
         <p:nvSpPr>
-          <p:cNvPr id="8" name="faq246|card|"/>
+          <p:cNvPr id="8" name="faq249|card|"/>
           <p:cNvSpPr txBox="1"/>
           <p:nvPr/>
         </p:nvSpPr>
@@ -13616,7 +13616,7 @@
       </p:sp>
       <p:sp>
         <p:nvSpPr>
-          <p:cNvPr id="9" name="faq247|card|"/>
+          <p:cNvPr id="9" name="faq250|card|"/>
           <p:cNvSpPr/>
           <p:nvPr/>
         </p:nvSpPr>
@@ -13662,7 +13662,7 @@
       </p:sp>
       <p:sp>
         <p:nvSpPr>
-          <p:cNvPr id="10" name="faq247|deco|"/>
+          <p:cNvPr id="10" name="faq250|deco|"/>
           <p:cNvSpPr/>
           <p:nvPr/>
         </p:nvSpPr>
@@ -13706,7 +13706,7 @@
       </p:sp>
       <p:pic>
         <p:nvPicPr>
-          <p:cNvPr id="11" name="faq247|icon|chat_deep.png" descr="chat_deep"/>
+          <p:cNvPr id="11" name="faq250|icon|chat_deep.png" descr="chat_deep"/>
           <p:cNvPicPr>
             <a:picLocks noChangeAspect="1"/>
           </p:cNvPicPr>
@@ -13731,7 +13731,7 @@
       </p:pic>
       <p:sp>
         <p:nvSpPr>
-          <p:cNvPr id="12" name="faq247|card|"/>
+          <p:cNvPr id="12" name="faq250|card|"/>
           <p:cNvSpPr txBox="1"/>
           <p:nvPr/>
         </p:nvSpPr>
@@ -13766,7 +13766,7 @@
       </p:sp>
       <p:sp>
         <p:nvSpPr>
-          <p:cNvPr id="13" name="faq247|card|"/>
+          <p:cNvPr id="13" name="faq250|card|"/>
           <p:cNvSpPr txBox="1"/>
           <p:nvPr/>
         </p:nvSpPr>
@@ -13801,7 +13801,7 @@
       </p:sp>
       <p:sp>
         <p:nvSpPr>
-          <p:cNvPr id="14" name="faq248|card|"/>
+          <p:cNvPr id="14" name="faq251|card|"/>
           <p:cNvSpPr/>
           <p:nvPr/>
         </p:nvSpPr>
@@ -13847,7 +13847,7 @@
       </p:sp>
       <p:sp>
         <p:nvSpPr>
-          <p:cNvPr id="15" name="faq248|deco|"/>
+          <p:cNvPr id="15" name="faq251|deco|"/>
           <p:cNvSpPr/>
           <p:nvPr/>
         </p:nvSpPr>
@@ -13891,7 +13891,7 @@
       </p:sp>
       <p:pic>
         <p:nvPicPr>
-          <p:cNvPr id="16" name="faq248|icon|chat_deep.png" descr="chat_deep"/>
+          <p:cNvPr id="16" name="faq251|icon|chat_deep.png" descr="chat_deep"/>
           <p:cNvPicPr>
             <a:picLocks noChangeAspect="1"/>
           </p:cNvPicPr>
@@ -13916,7 +13916,7 @@
       </p:pic>
       <p:sp>
         <p:nvSpPr>
-          <p:cNvPr id="17" name="faq248|card|"/>
+          <p:cNvPr id="17" name="faq251|card|"/>
           <p:cNvSpPr txBox="1"/>
           <p:nvPr/>
         </p:nvSpPr>
@@ -13951,7 +13951,7 @@
       </p:sp>
       <p:sp>
         <p:nvSpPr>
-          <p:cNvPr id="18" name="faq248|card|"/>
+          <p:cNvPr id="18" name="faq251|card|"/>
           <p:cNvSpPr txBox="1"/>
           <p:nvPr/>
         </p:nvSpPr>
@@ -13979,14 +13979,14 @@
                 </a:solidFill>
                 <a:latin typeface="Inter"/>
               </a:rPr>
-              <a:t>Today, orders arrive as a WhatsApp message and you take payment your usual way. Checkout through FluxMuse (Paystack, South Africa) is being switched on.</a:t>
-            </a:r>
-          </a:p>
-        </p:txBody>
-      </p:sp>
-      <p:sp>
-        <p:nvSpPr>
-          <p:cNvPr id="19" name="faq249|card|"/>
+              <a:t>Today, orders arrive as a WhatsApp message and you take payment your usual way. Checkout through FluxMuse, via our payment partners, is being switched on in South Africa.</a:t>
+            </a:r>
+          </a:p>
+        </p:txBody>
+      </p:sp>
+      <p:sp>
+        <p:nvSpPr>
+          <p:cNvPr id="19" name="faq252|card|"/>
           <p:cNvSpPr/>
           <p:nvPr/>
         </p:nvSpPr>
@@ -14032,7 +14032,7 @@
       </p:sp>
       <p:sp>
         <p:nvSpPr>
-          <p:cNvPr id="20" name="faq249|deco|"/>
+          <p:cNvPr id="20" name="faq252|deco|"/>
           <p:cNvSpPr/>
           <p:nvPr/>
         </p:nvSpPr>
@@ -14076,7 +14076,7 @@
       </p:sp>
       <p:pic>
         <p:nvPicPr>
-          <p:cNvPr id="21" name="faq249|icon|chat_deep.png" descr="chat_deep"/>
+          <p:cNvPr id="21" name="faq252|icon|chat_deep.png" descr="chat_deep"/>
           <p:cNvPicPr>
             <a:picLocks noChangeAspect="1"/>
           </p:cNvPicPr>
@@ -14101,7 +14101,7 @@
       </p:pic>
       <p:sp>
         <p:nvSpPr>
-          <p:cNvPr id="22" name="faq249|card|"/>
+          <p:cNvPr id="22" name="faq252|card|"/>
           <p:cNvSpPr txBox="1"/>
           <p:nvPr/>
         </p:nvSpPr>
@@ -14136,7 +14136,7 @@
       </p:sp>
       <p:sp>
         <p:nvSpPr>
-          <p:cNvPr id="23" name="faq249|placeholder|"/>
+          <p:cNvPr id="23" name="faq252|placeholder|"/>
           <p:cNvSpPr txBox="1"/>
           <p:nvPr/>
         </p:nvSpPr>
@@ -14267,7 +14267,7 @@
       <p:grpSpPr/>
       <p:sp>
         <p:nvSpPr>
-          <p:cNvPr id="2" name="hdr250|eyebrow|"/>
+          <p:cNvPr id="2" name="hdr253|eyebrow|"/>
           <p:cNvSpPr txBox="1"/>
           <p:nvPr/>
         </p:nvSpPr>
@@ -14302,7 +14302,7 @@
       </p:sp>
       <p:sp>
         <p:nvSpPr>
-          <p:cNvPr id="3" name="hdr250|title|"/>
+          <p:cNvPr id="3" name="hdr253|title|"/>
           <p:cNvSpPr txBox="1"/>
           <p:nvPr/>
         </p:nvSpPr>
@@ -14337,7 +14337,7 @@
       </p:sp>
       <p:sp>
         <p:nvSpPr>
-          <p:cNvPr id="4" name="faq251|card|"/>
+          <p:cNvPr id="4" name="faq254|card|"/>
           <p:cNvSpPr/>
           <p:nvPr/>
         </p:nvSpPr>
@@ -14383,7 +14383,7 @@
       </p:sp>
       <p:sp>
         <p:nvSpPr>
-          <p:cNvPr id="5" name="faq251|deco|"/>
+          <p:cNvPr id="5" name="faq254|deco|"/>
           <p:cNvSpPr/>
           <p:nvPr/>
         </p:nvSpPr>
@@ -14427,7 +14427,7 @@
       </p:sp>
       <p:pic>
         <p:nvPicPr>
-          <p:cNvPr id="6" name="faq251|icon|chat_deep.png" descr="chat_deep"/>
+          <p:cNvPr id="6" name="faq254|icon|chat_deep.png" descr="chat_deep"/>
           <p:cNvPicPr>
             <a:picLocks noChangeAspect="1"/>
           </p:cNvPicPr>
@@ -14452,7 +14452,7 @@
       </p:pic>
       <p:sp>
         <p:nvSpPr>
-          <p:cNvPr id="7" name="faq251|card|"/>
+          <p:cNvPr id="7" name="faq254|card|"/>
           <p:cNvSpPr txBox="1"/>
           <p:nvPr/>
         </p:nvSpPr>
@@ -14487,7 +14487,7 @@
       </p:sp>
       <p:sp>
         <p:nvSpPr>
-          <p:cNvPr id="8" name="faq251|card|"/>
+          <p:cNvPr id="8" name="faq254|card|"/>
           <p:cNvSpPr txBox="1"/>
           <p:nvPr/>
         </p:nvSpPr>
@@ -14522,7 +14522,7 @@
       </p:sp>
       <p:sp>
         <p:nvSpPr>
-          <p:cNvPr id="9" name="faq252|card|"/>
+          <p:cNvPr id="9" name="faq255|card|"/>
           <p:cNvSpPr/>
           <p:nvPr/>
         </p:nvSpPr>
@@ -14568,7 +14568,7 @@
       </p:sp>
       <p:sp>
         <p:nvSpPr>
-          <p:cNvPr id="10" name="faq252|deco|"/>
+          <p:cNvPr id="10" name="faq255|deco|"/>
           <p:cNvSpPr/>
           <p:nvPr/>
         </p:nvSpPr>
@@ -14612,7 +14612,7 @@
       </p:sp>
       <p:pic>
         <p:nvPicPr>
-          <p:cNvPr id="11" name="faq252|icon|chat_deep.png" descr="chat_deep"/>
+          <p:cNvPr id="11" name="faq255|icon|chat_deep.png" descr="chat_deep"/>
           <p:cNvPicPr>
             <a:picLocks noChangeAspect="1"/>
           </p:cNvPicPr>
@@ -14637,7 +14637,7 @@
       </p:pic>
       <p:sp>
         <p:nvSpPr>
-          <p:cNvPr id="12" name="faq252|card|"/>
+          <p:cNvPr id="12" name="faq255|card|"/>
           <p:cNvSpPr txBox="1"/>
           <p:nvPr/>
         </p:nvSpPr>
@@ -14672,7 +14672,7 @@
       </p:sp>
       <p:sp>
         <p:nvSpPr>
-          <p:cNvPr id="13" name="faq252|card|"/>
+          <p:cNvPr id="13" name="faq255|card|"/>
           <p:cNvSpPr txBox="1"/>
           <p:nvPr/>
         </p:nvSpPr>
@@ -14707,7 +14707,7 @@
       </p:sp>
       <p:sp>
         <p:nvSpPr>
-          <p:cNvPr id="14" name="faq253|card|"/>
+          <p:cNvPr id="14" name="faq256|card|"/>
           <p:cNvSpPr/>
           <p:nvPr/>
         </p:nvSpPr>
@@ -14753,7 +14753,7 @@
       </p:sp>
       <p:sp>
         <p:nvSpPr>
-          <p:cNvPr id="15" name="faq253|deco|"/>
+          <p:cNvPr id="15" name="faq256|deco|"/>
           <p:cNvSpPr/>
           <p:nvPr/>
         </p:nvSpPr>
@@ -14797,7 +14797,7 @@
       </p:sp>
       <p:pic>
         <p:nvPicPr>
-          <p:cNvPr id="16" name="faq253|icon|chat_deep.png" descr="chat_deep"/>
+          <p:cNvPr id="16" name="faq256|icon|chat_deep.png" descr="chat_deep"/>
           <p:cNvPicPr>
             <a:picLocks noChangeAspect="1"/>
           </p:cNvPicPr>
@@ -14822,7 +14822,7 @@
       </p:pic>
       <p:sp>
         <p:nvSpPr>
-          <p:cNvPr id="17" name="faq253|card|"/>
+          <p:cNvPr id="17" name="faq256|card|"/>
           <p:cNvSpPr txBox="1"/>
           <p:nvPr/>
         </p:nvSpPr>
@@ -14857,7 +14857,7 @@
       </p:sp>
       <p:sp>
         <p:nvSpPr>
-          <p:cNvPr id="18" name="faq253|card|"/>
+          <p:cNvPr id="18" name="faq256|card|"/>
           <p:cNvSpPr txBox="1"/>
           <p:nvPr/>
         </p:nvSpPr>
@@ -14885,14 +14885,14 @@
                 </a:solidFill>
                 <a:latin typeface="Inter"/>
               </a:rPr>
-              <a:t>Keep them. Sync from Shopify, WooCommerce and Takealot is being switched on. Until then, we build your catalogue from product photos.</a:t>
-            </a:r>
-          </a:p>
-        </p:txBody>
-      </p:sp>
-      <p:sp>
-        <p:nvSpPr>
-          <p:cNvPr id="19" name="faq254|card|"/>
+              <a:t>Keep them. Sync from Shopify and WooCommerce is being switched on. Until then, we build your catalogue from product photos.</a:t>
+            </a:r>
+          </a:p>
+        </p:txBody>
+      </p:sp>
+      <p:sp>
+        <p:nvSpPr>
+          <p:cNvPr id="19" name="faq257|card|"/>
           <p:cNvSpPr/>
           <p:nvPr/>
         </p:nvSpPr>
@@ -14938,7 +14938,7 @@
       </p:sp>
       <p:sp>
         <p:nvSpPr>
-          <p:cNvPr id="20" name="faq254|deco|"/>
+          <p:cNvPr id="20" name="faq257|deco|"/>
           <p:cNvSpPr/>
           <p:nvPr/>
         </p:nvSpPr>
@@ -14982,7 +14982,7 @@
       </p:sp>
       <p:pic>
         <p:nvPicPr>
-          <p:cNvPr id="21" name="faq254|icon|chat_deep.png" descr="chat_deep"/>
+          <p:cNvPr id="21" name="faq257|icon|chat_deep.png" descr="chat_deep"/>
           <p:cNvPicPr>
             <a:picLocks noChangeAspect="1"/>
           </p:cNvPicPr>
@@ -15007,7 +15007,7 @@
       </p:pic>
       <p:sp>
         <p:nvSpPr>
-          <p:cNvPr id="22" name="faq254|card|"/>
+          <p:cNvPr id="22" name="faq257|card|"/>
           <p:cNvSpPr txBox="1"/>
           <p:nvPr/>
         </p:nvSpPr>
@@ -15042,7 +15042,7 @@
       </p:sp>
       <p:sp>
         <p:nvSpPr>
-          <p:cNvPr id="23" name="faq254|card|"/>
+          <p:cNvPr id="23" name="faq257|card|"/>
           <p:cNvSpPr txBox="1"/>
           <p:nvPr/>
         </p:nvSpPr>
@@ -15173,7 +15173,7 @@
       <p:grpSpPr/>
       <p:sp>
         <p:nvSpPr>
-          <p:cNvPr id="2" name="hdr169|eyebrow|"/>
+          <p:cNvPr id="2" name="hdr173|eyebrow|"/>
           <p:cNvSpPr txBox="1"/>
           <p:nvPr/>
         </p:nvSpPr>
@@ -15208,7 +15208,7 @@
       </p:sp>
       <p:sp>
         <p:nvSpPr>
-          <p:cNvPr id="3" name="hdr169|title|"/>
+          <p:cNvPr id="3" name="hdr173|title|"/>
           <p:cNvSpPr txBox="1"/>
           <p:nvPr/>
         </p:nvSpPr>
@@ -15247,7 +15247,7 @@
       </p:sp>
       <p:sp>
         <p:nvSpPr>
-          <p:cNvPr id="4" name="g170|body|"/>
+          <p:cNvPr id="4" name="g174|body|"/>
           <p:cNvSpPr txBox="1"/>
           <p:nvPr/>
         </p:nvSpPr>
@@ -15282,7 +15282,7 @@
       </p:sp>
       <p:sp>
         <p:nvSpPr>
-          <p:cNvPr id="5" name="g171|chip|"/>
+          <p:cNvPr id="5" name="g175|chip|"/>
           <p:cNvSpPr/>
           <p:nvPr/>
         </p:nvSpPr>
@@ -15328,7 +15328,7 @@
       </p:sp>
       <p:sp>
         <p:nvSpPr>
-          <p:cNvPr id="6" name="g171|chip|"/>
+          <p:cNvPr id="6" name="g175|chip|"/>
           <p:cNvSpPr txBox="1"/>
           <p:nvPr/>
         </p:nvSpPr>
@@ -15363,7 +15363,7 @@
       </p:sp>
       <p:sp>
         <p:nvSpPr>
-          <p:cNvPr id="7" name="meet172|card|"/>
+          <p:cNvPr id="7" name="meet176|card|"/>
           <p:cNvSpPr/>
           <p:nvPr/>
         </p:nvSpPr>
@@ -15409,7 +15409,7 @@
       </p:sp>
       <p:sp>
         <p:nvSpPr>
-          <p:cNvPr id="8" name="meet172|eyebrow|"/>
+          <p:cNvPr id="8" name="meet176|eyebrow|"/>
           <p:cNvSpPr txBox="1"/>
           <p:nvPr/>
         </p:nvSpPr>
@@ -15444,7 +15444,7 @@
       </p:sp>
       <p:pic>
         <p:nvPicPr>
-          <p:cNvPr id="9" name="g173|icon|checkCircle_orange.png" descr="checkCircle_orange"/>
+          <p:cNvPr id="9" name="g177|icon|checkCircle_orange.png" descr="checkCircle_orange"/>
           <p:cNvPicPr>
             <a:picLocks noChangeAspect="1"/>
           </p:cNvPicPr>
@@ -15469,7 +15469,7 @@
       </p:pic>
       <p:sp>
         <p:nvSpPr>
-          <p:cNvPr id="10" name="g173|card|"/>
+          <p:cNvPr id="10" name="g177|card|"/>
           <p:cNvSpPr txBox="1"/>
           <p:nvPr/>
         </p:nvSpPr>
@@ -15504,7 +15504,7 @@
       </p:sp>
       <p:pic>
         <p:nvPicPr>
-          <p:cNvPr id="11" name="g174|icon|checkCircle_orange.png" descr="checkCircle_orange"/>
+          <p:cNvPr id="11" name="g178|icon|checkCircle_orange.png" descr="checkCircle_orange"/>
           <p:cNvPicPr>
             <a:picLocks noChangeAspect="1"/>
           </p:cNvPicPr>
@@ -15529,7 +15529,7 @@
       </p:pic>
       <p:sp>
         <p:nvSpPr>
-          <p:cNvPr id="12" name="g174|card|"/>
+          <p:cNvPr id="12" name="g178|card|"/>
           <p:cNvSpPr txBox="1"/>
           <p:nvPr/>
         </p:nvSpPr>
@@ -15564,7 +15564,7 @@
       </p:sp>
       <p:pic>
         <p:nvPicPr>
-          <p:cNvPr id="13" name="g175|icon|checkCircle_orange.png" descr="checkCircle_orange"/>
+          <p:cNvPr id="13" name="g179|icon|checkCircle_orange.png" descr="checkCircle_orange"/>
           <p:cNvPicPr>
             <a:picLocks noChangeAspect="1"/>
           </p:cNvPicPr>
@@ -15589,7 +15589,7 @@
       </p:pic>
       <p:sp>
         <p:nvSpPr>
-          <p:cNvPr id="14" name="g175|card|"/>
+          <p:cNvPr id="14" name="g179|card|"/>
           <p:cNvSpPr txBox="1"/>
           <p:nvPr/>
         </p:nvSpPr>
@@ -15624,7 +15624,7 @@
       </p:sp>
       <p:pic>
         <p:nvPicPr>
-          <p:cNvPr id="15" name="g176|icon|checkCircle_orange.png" descr="checkCircle_orange"/>
+          <p:cNvPr id="15" name="g180|icon|checkCircle_orange.png" descr="checkCircle_orange"/>
           <p:cNvPicPr>
             <a:picLocks noChangeAspect="1"/>
           </p:cNvPicPr>
@@ -15649,7 +15649,7 @@
       </p:pic>
       <p:sp>
         <p:nvSpPr>
-          <p:cNvPr id="16" name="g176|card|"/>
+          <p:cNvPr id="16" name="g180|card|"/>
           <p:cNvSpPr txBox="1"/>
           <p:nvPr/>
         </p:nvSpPr>
@@ -15684,7 +15684,7 @@
       </p:sp>
       <p:pic>
         <p:nvPicPr>
-          <p:cNvPr id="17" name="g177|icon|checkCircle_orange.png" descr="checkCircle_orange"/>
+          <p:cNvPr id="17" name="g181|icon|checkCircle_orange.png" descr="checkCircle_orange"/>
           <p:cNvPicPr>
             <a:picLocks noChangeAspect="1"/>
           </p:cNvPicPr>
@@ -15709,7 +15709,7 @@
       </p:pic>
       <p:sp>
         <p:nvSpPr>
-          <p:cNvPr id="18" name="g177|card|"/>
+          <p:cNvPr id="18" name="g181|card|"/>
           <p:cNvSpPr txBox="1"/>
           <p:nvPr/>
         </p:nvSpPr>
@@ -15744,7 +15744,7 @@
       </p:sp>
       <p:sp>
         <p:nvSpPr>
-          <p:cNvPr id="19" name="meet178|card|"/>
+          <p:cNvPr id="19" name="meet182|card|"/>
           <p:cNvSpPr/>
           <p:nvPr/>
         </p:nvSpPr>
@@ -15790,7 +15790,7 @@
       </p:sp>
       <p:sp>
         <p:nvSpPr>
-          <p:cNvPr id="20" name="meet178|eyebrow|"/>
+          <p:cNvPr id="20" name="meet182|eyebrow|"/>
           <p:cNvSpPr txBox="1"/>
           <p:nvPr/>
         </p:nvSpPr>
@@ -15825,7 +15825,7 @@
       </p:sp>
       <p:pic>
         <p:nvPicPr>
-          <p:cNvPr id="21" name="g179|icon|clock_white.png" descr="clock_white"/>
+          <p:cNvPr id="21" name="g183|icon|clock_white.png" descr="clock_white"/>
           <p:cNvPicPr>
             <a:picLocks noChangeAspect="1"/>
           </p:cNvPicPr>
@@ -15850,7 +15850,7 @@
       </p:pic>
       <p:sp>
         <p:nvSpPr>
-          <p:cNvPr id="22" name="g179|card|"/>
+          <p:cNvPr id="22" name="g183|card|"/>
           <p:cNvSpPr txBox="1"/>
           <p:nvPr/>
         </p:nvSpPr>
@@ -15885,7 +15885,7 @@
       </p:sp>
       <p:pic>
         <p:nvPicPr>
-          <p:cNvPr id="23" name="g180|icon|clock_white.png" descr="clock_white"/>
+          <p:cNvPr id="23" name="g184|icon|clock_white.png" descr="clock_white"/>
           <p:cNvPicPr>
             <a:picLocks noChangeAspect="1"/>
           </p:cNvPicPr>
@@ -15910,7 +15910,7 @@
       </p:pic>
       <p:sp>
         <p:nvSpPr>
-          <p:cNvPr id="24" name="g180|card|"/>
+          <p:cNvPr id="24" name="g184|card|"/>
           <p:cNvSpPr txBox="1"/>
           <p:nvPr/>
         </p:nvSpPr>
@@ -15945,7 +15945,7 @@
       </p:sp>
       <p:pic>
         <p:nvPicPr>
-          <p:cNvPr id="25" name="g181|icon|clock_white.png" descr="clock_white"/>
+          <p:cNvPr id="25" name="g185|icon|clock_white.png" descr="clock_white"/>
           <p:cNvPicPr>
             <a:picLocks noChangeAspect="1"/>
           </p:cNvPicPr>
@@ -15970,7 +15970,7 @@
       </p:pic>
       <p:sp>
         <p:nvSpPr>
-          <p:cNvPr id="26" name="g181|card|"/>
+          <p:cNvPr id="26" name="g185|card|"/>
           <p:cNvSpPr txBox="1"/>
           <p:nvPr/>
         </p:nvSpPr>
@@ -16101,7 +16101,7 @@
       <p:grpSpPr/>
       <p:sp>
         <p:nvSpPr>
-          <p:cNvPr id="2" name="hdr182|eyebrow|"/>
+          <p:cNvPr id="2" name="hdr186|eyebrow|"/>
           <p:cNvSpPr txBox="1"/>
           <p:nvPr/>
         </p:nvSpPr>
@@ -16136,7 +16136,7 @@
       </p:sp>
       <p:sp>
         <p:nvSpPr>
-          <p:cNvPr id="3" name="hdr182|title|"/>
+          <p:cNvPr id="3" name="hdr186|title|"/>
           <p:cNvSpPr txBox="1"/>
           <p:nvPr/>
         </p:nvSpPr>
@@ -16171,7 +16171,7 @@
       </p:sp>
       <p:pic>
         <p:nvPicPr>
-          <p:cNvPr id="4" name="g183|img|infographics/how-fluxmuse-works.png" descr="Loop: Plan, Create (captions, images, short clips), Publish (WhatsApp Status, consented broadcasts, TikTok), Sell (shop link from photos, every order on WhatsApp), Learn"/>
+          <p:cNvPr id="4" name="g187|img|infographics/how-fluxmuse-works.png" descr="Loop: Plan, Create (captions, images, short clips), Publish (WhatsApp Status, consented broadcasts, TikTok), Sell (shop link from photos, every order on WhatsApp), Learn"/>
           <p:cNvPicPr>
             <a:picLocks noChangeAspect="1"/>
           </p:cNvPicPr>
@@ -16292,7 +16292,7 @@
       <p:grpSpPr/>
       <p:sp>
         <p:nvSpPr>
-          <p:cNvPr id="2" name="hdr184|eyebrow|"/>
+          <p:cNvPr id="2" name="hdr188|eyebrow|"/>
           <p:cNvSpPr txBox="1"/>
           <p:nvPr/>
         </p:nvSpPr>
@@ -16327,7 +16327,7 @@
       </p:sp>
       <p:sp>
         <p:nvSpPr>
-          <p:cNvPr id="3" name="hdr184|title|"/>
+          <p:cNvPr id="3" name="hdr188|title|"/>
           <p:cNvSpPr txBox="1"/>
           <p:nvPr/>
         </p:nvSpPr>
@@ -16362,7 +16362,7 @@
       </p:sp>
       <p:pic>
         <p:nvPicPr>
-          <p:cNvPr id="4" name="g185|img|infographics/whatsapp-commerce-flow.png" descr="Discover, Chat, Catalog, Cart, Pay (Paystack, South Africa, being switched on), Order alert, Come back; checkout through FluxMuse not yet tested with real money"/>
+          <p:cNvPr id="4" name="g189|img|infographics/whatsapp-commerce-flow.png" descr="Discover, Chat, Catalog, Cart, Pay (card and EFT in South Africa, being switched on), Order alert, Come back; checkout through FluxMuse not yet tested with real money"/>
           <p:cNvPicPr>
             <a:picLocks noChangeAspect="1"/>
           </p:cNvPicPr>
@@ -16483,7 +16483,7 @@
       <p:grpSpPr/>
       <p:sp>
         <p:nvSpPr>
-          <p:cNvPr id="2" name="hdr186|eyebrow|"/>
+          <p:cNvPr id="2" name="hdr190|eyebrow|"/>
           <p:cNvSpPr txBox="1"/>
           <p:nvPr/>
         </p:nvSpPr>
@@ -16518,7 +16518,7 @@
       </p:sp>
       <p:sp>
         <p:nvSpPr>
-          <p:cNvPr id="3" name="hdr186|title|"/>
+          <p:cNvPr id="3" name="hdr190|title|"/>
           <p:cNvSpPr txBox="1"/>
           <p:nvPr/>
         </p:nvSpPr>
@@ -16553,7 +16553,7 @@
       </p:sp>
       <p:pic>
         <p:nvPicPr>
-          <p:cNvPr id="4" name="g187|img|infographics/platform-stack.png" descr="Six layers: channels, AI team, shop and orders, growth, integrations, trust; each chip marked live, being switched on or not available"/>
+          <p:cNvPr id="4" name="g191|img|infographics/platform-stack.png" descr="Six layers: channels, AI team, shop and orders, growth, integrations, trust; each chip marked live, being switched on or not available"/>
           <p:cNvPicPr>
             <a:picLocks noChangeAspect="1"/>
           </p:cNvPicPr>
@@ -16674,7 +16674,7 @@
       <p:grpSpPr/>
       <p:sp>
         <p:nvSpPr>
-          <p:cNvPr id="2" name="hdr188|eyebrow|"/>
+          <p:cNvPr id="2" name="hdr192|eyebrow|"/>
           <p:cNvSpPr txBox="1"/>
           <p:nvPr/>
         </p:nvSpPr>
@@ -16709,7 +16709,7 @@
       </p:sp>
       <p:sp>
         <p:nvSpPr>
-          <p:cNvPr id="3" name="hdr188|title|"/>
+          <p:cNvPr id="3" name="hdr192|title|"/>
           <p:cNvSpPr txBox="1"/>
           <p:nvPr/>
         </p:nvSpPr>
@@ -16744,7 +16744,7 @@
       </p:sp>
       <p:sp>
         <p:nvSpPr>
-          <p:cNvPr id="4" name="intg189|card|"/>
+          <p:cNvPr id="4" name="intg193|card|"/>
           <p:cNvSpPr/>
           <p:nvPr/>
         </p:nvSpPr>
@@ -16790,7 +16790,7 @@
       </p:sp>
       <p:sp>
         <p:nvSpPr>
-          <p:cNvPr id="5" name="intg189|deco|"/>
+          <p:cNvPr id="5" name="intg193|deco|"/>
           <p:cNvSpPr/>
           <p:nvPr/>
         </p:nvSpPr>
@@ -16834,7 +16834,7 @@
       </p:sp>
       <p:pic>
         <p:nvPicPr>
-          <p:cNvPr id="6" name="intg189|icon|plug_deep.png" descr="plug_deep"/>
+          <p:cNvPr id="6" name="intg193|icon|plug_deep.png" descr="plug_deep"/>
           <p:cNvPicPr>
             <a:picLocks noChangeAspect="1"/>
           </p:cNvPicPr>
@@ -16859,7 +16859,7 @@
       </p:pic>
       <p:sp>
         <p:nvSpPr>
-          <p:cNvPr id="7" name="intg189|card|"/>
+          <p:cNvPr id="7" name="intg193|card|"/>
           <p:cNvSpPr txBox="1"/>
           <p:nvPr/>
         </p:nvSpPr>
@@ -16894,7 +16894,7 @@
       </p:sp>
       <p:sp>
         <p:nvSpPr>
-          <p:cNvPr id="8" name="g190|chip|"/>
+          <p:cNvPr id="8" name="g194|chip|"/>
           <p:cNvSpPr/>
           <p:nvPr/>
         </p:nvSpPr>
@@ -16943,7 +16943,7 @@
       </p:sp>
       <p:sp>
         <p:nvSpPr>
-          <p:cNvPr id="9" name="g190|chip|"/>
+          <p:cNvPr id="9" name="g194|chip|"/>
           <p:cNvSpPr txBox="1"/>
           <p:nvPr/>
         </p:nvSpPr>
@@ -16978,7 +16978,7 @@
       </p:sp>
       <p:sp>
         <p:nvSpPr>
-          <p:cNvPr id="10" name="g191|chip|"/>
+          <p:cNvPr id="10" name="g195|chip|"/>
           <p:cNvSpPr/>
           <p:nvPr/>
         </p:nvSpPr>
@@ -17027,7 +17027,7 @@
       </p:sp>
       <p:sp>
         <p:nvSpPr>
-          <p:cNvPr id="11" name="g191|chip|"/>
+          <p:cNvPr id="11" name="g195|chip|"/>
           <p:cNvSpPr txBox="1"/>
           <p:nvPr/>
         </p:nvSpPr>
@@ -17062,7 +17062,7 @@
       </p:sp>
       <p:sp>
         <p:nvSpPr>
-          <p:cNvPr id="12" name="g192|chip|"/>
+          <p:cNvPr id="12" name="g196|chip|"/>
           <p:cNvSpPr/>
           <p:nvPr/>
         </p:nvSpPr>
@@ -17111,7 +17111,7 @@
       </p:sp>
       <p:sp>
         <p:nvSpPr>
-          <p:cNvPr id="13" name="g192|chip|"/>
+          <p:cNvPr id="13" name="g196|chip|"/>
           <p:cNvSpPr txBox="1"/>
           <p:nvPr/>
         </p:nvSpPr>
@@ -17139,14 +17139,14 @@
                 </a:solidFill>
                 <a:latin typeface="Inter"/>
               </a:rPr>
-              <a:t>Takealot sync</a:t>
-            </a:r>
-          </a:p>
-        </p:txBody>
-      </p:sp>
-      <p:sp>
-        <p:nvSpPr>
-          <p:cNvPr id="14" name="g193|chip|"/>
+              <a:t>FB/Instagram posts</a:t>
+            </a:r>
+          </a:p>
+        </p:txBody>
+      </p:sp>
+      <p:sp>
+        <p:nvSpPr>
+          <p:cNvPr id="14" name="g197|chip|"/>
           <p:cNvSpPr/>
           <p:nvPr/>
         </p:nvSpPr>
@@ -17195,7 +17195,7 @@
       </p:sp>
       <p:sp>
         <p:nvSpPr>
-          <p:cNvPr id="15" name="g193|chip|"/>
+          <p:cNvPr id="15" name="g197|chip|"/>
           <p:cNvSpPr txBox="1"/>
           <p:nvPr/>
         </p:nvSpPr>
@@ -17223,14 +17223,14 @@
                 </a:solidFill>
                 <a:latin typeface="Inter"/>
               </a:rPr>
-              <a:t>FB/Instagram posts</a:t>
-            </a:r>
-          </a:p>
-        </p:txBody>
-      </p:sp>
-      <p:sp>
-        <p:nvSpPr>
-          <p:cNvPr id="16" name="g194|chip|"/>
+              <a:t>AI Voice (beta)</a:t>
+            </a:r>
+          </a:p>
+        </p:txBody>
+      </p:sp>
+      <p:sp>
+        <p:nvSpPr>
+          <p:cNvPr id="16" name="g198|chip|"/>
           <p:cNvSpPr/>
           <p:nvPr/>
         </p:nvSpPr>
@@ -17279,7 +17279,7 @@
       </p:sp>
       <p:sp>
         <p:nvSpPr>
-          <p:cNvPr id="17" name="g194|chip|"/>
+          <p:cNvPr id="17" name="g198|chip|"/>
           <p:cNvSpPr txBox="1"/>
           <p:nvPr/>
         </p:nvSpPr>
@@ -17307,90 +17307,6 @@
                 </a:solidFill>
                 <a:latin typeface="Inter"/>
               </a:rPr>
-              <a:t>AI Voice (beta)</a:t>
-            </a:r>
-          </a:p>
-        </p:txBody>
-      </p:sp>
-      <p:sp>
-        <p:nvSpPr>
-          <p:cNvPr id="18" name="g195|chip|"/>
-          <p:cNvSpPr/>
-          <p:nvPr/>
-        </p:nvSpPr>
-        <p:spPr>
-          <a:xfrm>
-            <a:off x="3337560" y="4114800"/>
-            <a:ext cx="2286000" cy="548640"/>
-          </a:xfrm>
-          <a:prstGeom prst="roundRect">
-            <a:avLst>
-              <a:gd name="adj" fmla="val 50000"/>
-            </a:avLst>
-          </a:prstGeom>
-          <a:solidFill>
-            <a:srgbClr val="FFFFFF"/>
-          </a:solidFill>
-          <a:ln w="12700">
-            <a:solidFill>
-              <a:srgbClr val="5B6670"/>
-            </a:solidFill>
-            <a:prstDash val="dash"/>
-          </a:ln>
-          <a:effectLst/>
-        </p:spPr>
-        <p:style>
-          <a:lnRef idx="1">
-            <a:schemeClr val="accent1"/>
-          </a:lnRef>
-          <a:fillRef idx="3">
-            <a:schemeClr val="accent1"/>
-          </a:fillRef>
-          <a:effectRef idx="2">
-            <a:schemeClr val="accent1"/>
-          </a:effectRef>
-          <a:fontRef idx="minor">
-            <a:schemeClr val="lt1"/>
-          </a:fontRef>
-        </p:style>
-        <p:txBody>
-          <a:bodyPr rtlCol="0" anchor="ctr"/>
-          <a:lstStyle/>
-          <a:p>
-            <a:pPr algn="ctr"/>
-          </a:p>
-        </p:txBody>
-      </p:sp>
-      <p:sp>
-        <p:nvSpPr>
-          <p:cNvPr id="19" name="g195|chip|"/>
-          <p:cNvSpPr txBox="1"/>
-          <p:nvPr/>
-        </p:nvSpPr>
-        <p:spPr>
-          <a:xfrm>
-            <a:off x="3337560" y="4114800"/>
-            <a:ext cx="2286000" cy="548640"/>
-          </a:xfrm>
-          <a:prstGeom prst="rect">
-            <a:avLst/>
-          </a:prstGeom>
-          <a:noFill/>
-        </p:spPr>
-        <p:txBody>
-          <a:bodyPr wrap="square" lIns="0" rIns="0" tIns="0" bIns="0" anchor="ctr">
-            <a:noAutofit/>
-          </a:bodyPr>
-          <a:lstStyle/>
-          <a:p>
-            <a:pPr algn="ctr"/>
-            <a:r>
-              <a:rPr sz="1400" b="1">
-                <a:solidFill>
-                  <a:srgbClr val="20242B"/>
-                </a:solidFill>
-                <a:latin typeface="Inter"/>
-              </a:rPr>
               <a:t>Daily digest</a:t>
             </a:r>
           </a:p>
@@ -17398,7 +17314,7 @@
       </p:sp>
       <p:sp>
         <p:nvSpPr>
-          <p:cNvPr id="20" name="intg189|caption|"/>
+          <p:cNvPr id="18" name="intg193|caption|"/>
           <p:cNvSpPr txBox="1"/>
           <p:nvPr/>
         </p:nvSpPr>
@@ -17433,7 +17349,7 @@
       </p:sp>
       <p:sp>
         <p:nvSpPr>
-          <p:cNvPr id="21" name="team196|card|"/>
+          <p:cNvPr id="19" name="team199|card|"/>
           <p:cNvSpPr/>
           <p:nvPr/>
         </p:nvSpPr>
@@ -17479,7 +17395,7 @@
       </p:sp>
       <p:sp>
         <p:nvSpPr>
-          <p:cNvPr id="22" name="team196|deco|"/>
+          <p:cNvPr id="20" name="team199|deco|"/>
           <p:cNvSpPr/>
           <p:nvPr/>
         </p:nvSpPr>
@@ -17523,7 +17439,7 @@
       </p:sp>
       <p:pic>
         <p:nvPicPr>
-          <p:cNvPr id="23" name="team196|icon|users_deep.png" descr="users_deep"/>
+          <p:cNvPr id="21" name="team199|icon|users_deep.png" descr="users_deep"/>
           <p:cNvPicPr>
             <a:picLocks noChangeAspect="1"/>
           </p:cNvPicPr>
@@ -17548,7 +17464,7 @@
       </p:pic>
       <p:sp>
         <p:nvSpPr>
-          <p:cNvPr id="24" name="team196|card|"/>
+          <p:cNvPr id="22" name="team199|card|"/>
           <p:cNvSpPr txBox="1"/>
           <p:nvPr/>
         </p:nvSpPr>
@@ -17583,7 +17499,7 @@
       </p:sp>
       <p:sp>
         <p:nvSpPr>
-          <p:cNvPr id="25" name="g197|deco|"/>
+          <p:cNvPr id="23" name="g200|deco|"/>
           <p:cNvSpPr/>
           <p:nvPr/>
         </p:nvSpPr>
@@ -17627,7 +17543,7 @@
       </p:sp>
       <p:pic>
         <p:nvPicPr>
-          <p:cNvPr id="26" name="g197|icon|chat_deep.png" descr="chat_deep"/>
+          <p:cNvPr id="24" name="g200|icon|chat_deep.png" descr="chat_deep"/>
           <p:cNvPicPr>
             <a:picLocks noChangeAspect="1"/>
           </p:cNvPicPr>
@@ -17652,7 +17568,7 @@
       </p:pic>
       <p:sp>
         <p:nvSpPr>
-          <p:cNvPr id="27" name="g197|body|"/>
+          <p:cNvPr id="25" name="g200|body|"/>
           <p:cNvSpPr txBox="1"/>
           <p:nvPr/>
         </p:nvSpPr>
@@ -17687,7 +17603,7 @@
       </p:sp>
       <p:sp>
         <p:nvSpPr>
-          <p:cNvPr id="28" name="g198|deco|"/>
+          <p:cNvPr id="26" name="g201|deco|"/>
           <p:cNvSpPr/>
           <p:nvPr/>
         </p:nvSpPr>
@@ -17731,7 +17647,7 @@
       </p:sp>
       <p:pic>
         <p:nvPicPr>
-          <p:cNvPr id="29" name="g198|icon|layers_deep.png" descr="layers_deep"/>
+          <p:cNvPr id="27" name="g201|icon|layers_deep.png" descr="layers_deep"/>
           <p:cNvPicPr>
             <a:picLocks noChangeAspect="1"/>
           </p:cNvPicPr>
@@ -17756,7 +17672,7 @@
       </p:pic>
       <p:sp>
         <p:nvSpPr>
-          <p:cNvPr id="30" name="g198|body|"/>
+          <p:cNvPr id="28" name="g201|body|"/>
           <p:cNvSpPr txBox="1"/>
           <p:nvPr/>
         </p:nvSpPr>
@@ -17791,7 +17707,7 @@
       </p:sp>
       <p:sp>
         <p:nvSpPr>
-          <p:cNvPr id="31" name="g199|deco|"/>
+          <p:cNvPr id="29" name="g202|deco|"/>
           <p:cNvSpPr/>
           <p:nvPr/>
         </p:nvSpPr>
@@ -17835,7 +17751,7 @@
       </p:sp>
       <p:pic>
         <p:nvPicPr>
-          <p:cNvPr id="32" name="g199|icon|bag_deep.png" descr="bag_deep"/>
+          <p:cNvPr id="30" name="g202|icon|bag_deep.png" descr="bag_deep"/>
           <p:cNvPicPr>
             <a:picLocks noChangeAspect="1"/>
           </p:cNvPicPr>
@@ -17860,7 +17776,7 @@
       </p:pic>
       <p:sp>
         <p:nvSpPr>
-          <p:cNvPr id="33" name="g199|body|"/>
+          <p:cNvPr id="31" name="g202|body|"/>
           <p:cNvSpPr txBox="1"/>
           <p:nvPr/>
         </p:nvSpPr>
@@ -17895,7 +17811,7 @@
       </p:sp>
       <p:sp>
         <p:nvSpPr>
-          <p:cNvPr id="34" name="g200|deco|"/>
+          <p:cNvPr id="32" name="g203|deco|"/>
           <p:cNvSpPr/>
           <p:nvPr/>
         </p:nvSpPr>
@@ -17939,7 +17855,7 @@
       </p:sp>
       <p:pic>
         <p:nvPicPr>
-          <p:cNvPr id="35" name="g200|icon|send_deep.png" descr="send_deep"/>
+          <p:cNvPr id="33" name="g203|icon|send_deep.png" descr="send_deep"/>
           <p:cNvPicPr>
             <a:picLocks noChangeAspect="1"/>
           </p:cNvPicPr>
@@ -17964,7 +17880,7 @@
       </p:pic>
       <p:sp>
         <p:nvSpPr>
-          <p:cNvPr id="36" name="g200|body|"/>
+          <p:cNvPr id="34" name="g203|body|"/>
           <p:cNvSpPr txBox="1"/>
           <p:nvPr/>
         </p:nvSpPr>
@@ -17999,7 +17915,7 @@
       </p:sp>
       <p:sp>
         <p:nvSpPr>
-          <p:cNvPr id="37" name="g201|deco|"/>
+          <p:cNvPr id="35" name="g204|deco|"/>
           <p:cNvSpPr/>
           <p:nvPr/>
         </p:nvSpPr>
@@ -18043,7 +17959,7 @@
       </p:sp>
       <p:pic>
         <p:nvPicPr>
-          <p:cNvPr id="38" name="g201|icon|globe_deep.png" descr="globe_deep"/>
+          <p:cNvPr id="36" name="g204|icon|globe_deep.png" descr="globe_deep"/>
           <p:cNvPicPr>
             <a:picLocks noChangeAspect="1"/>
           </p:cNvPicPr>
@@ -18068,7 +17984,7 @@
       </p:pic>
       <p:sp>
         <p:nvSpPr>
-          <p:cNvPr id="39" name="g201|body|"/>
+          <p:cNvPr id="37" name="g204|body|"/>
           <p:cNvSpPr txBox="1"/>
           <p:nvPr/>
         </p:nvSpPr>
@@ -18103,7 +18019,7 @@
       </p:sp>
       <p:sp>
         <p:nvSpPr>
-          <p:cNvPr id="40" name="chrome|footer|"/>
+          <p:cNvPr id="38" name="chrome|footer|"/>
           <p:cNvSpPr txBox="1"/>
           <p:nvPr/>
         </p:nvSpPr>
@@ -18138,7 +18054,7 @@
       </p:sp>
       <p:sp>
         <p:nvSpPr>
-          <p:cNvPr id="41" name="chrome|slidenum|"/>
+          <p:cNvPr id="39" name="chrome|slidenum|"/>
           <p:cNvSpPr txBox="1"/>
           <p:nvPr/>
         </p:nvSpPr>
@@ -18199,7 +18115,7 @@
       <p:grpSpPr/>
       <p:sp>
         <p:nvSpPr>
-          <p:cNvPr id="2" name="hdr202|eyebrow|"/>
+          <p:cNvPr id="2" name="hdr205|eyebrow|"/>
           <p:cNvSpPr txBox="1"/>
           <p:nvPr/>
         </p:nvSpPr>
@@ -18234,7 +18150,7 @@
       </p:sp>
       <p:sp>
         <p:nvSpPr>
-          <p:cNvPr id="3" name="hdr202|title|"/>
+          <p:cNvPr id="3" name="hdr205|title|"/>
           <p:cNvSpPr txBox="1"/>
           <p:nvPr/>
         </p:nvSpPr>
@@ -18269,7 +18185,7 @@
       </p:sp>
       <p:pic>
         <p:nvPicPr>
-          <p:cNvPr id="4" name="g203|img|infographics/payment-coverage-map.png" descr="Tile map: South Africa live with Paystack; Nigeria, Kenya and Ghana priced, not on sale; other countries provider contracted, account pending; Botswana and Namibia coming soon"/>
+          <p:cNvPr id="4" name="g206|img|infographics/payment-coverage-map.png" descr="Tile map by country status: South Africa live, paid sign-up by card and EFT; Nigeria, Kenya and Ghana priced, not on sale; 19 more countries in our payment partners' reach, not open yet; Botswana and Namibia coming soon"/>
           <p:cNvPicPr>
             <a:picLocks noChangeAspect="1"/>
           </p:cNvPicPr>
@@ -18390,7 +18306,7 @@
       <p:grpSpPr/>
       <p:sp>
         <p:nvSpPr>
-          <p:cNvPr id="2" name="hdr204|eyebrow|"/>
+          <p:cNvPr id="2" name="hdr207|eyebrow|"/>
           <p:cNvSpPr txBox="1"/>
           <p:nvPr/>
         </p:nvSpPr>
@@ -18425,7 +18341,7 @@
       </p:sp>
       <p:sp>
         <p:nvSpPr>
-          <p:cNvPr id="3" name="hdr204|title|"/>
+          <p:cNvPr id="3" name="hdr207|title|"/>
           <p:cNvSpPr txBox="1"/>
           <p:nvPr/>
         </p:nvSpPr>
@@ -18460,7 +18376,7 @@
       </p:sp>
       <p:pic>
         <p:nvPicPr>
-          <p:cNvPr id="4" name="g205|img|infographics/segment-sme.png" descr="SMEs: three pains, three newly launched answers, Growth R1,999 a month, Founding Member R1,399 for the first two bills"/>
+          <p:cNvPr id="4" name="g208|img|infographics/segment-sme.png" descr="SMEs: three pains, three newly launched answers, Growth R1,999 a month, Founding Member R1,399 for the first two bills"/>
           <p:cNvPicPr>
             <a:picLocks noChangeAspect="1"/>
           </p:cNvPicPr>
